--- a/3-Master_Plan/re_entry/HEROs_and_PASSes/slides/auto/CHAR_PD20_HAND_AUTO.pptx
+++ b/3-Master_Plan/re_entry/HEROs_and_PASSes/slides/auto/CHAR_PD20_HAND_AUTO.pptx
@@ -5,12 +5,12 @@
     <p:sldMasterId id="2147483648" r:id="rId1"/>
   </p:sldMasterIdLst>
   <p:sldIdLst>
-    <p:sldId id="256" r:id="rId2"/>
-    <p:sldId id="257" r:id="rId3"/>
-    <p:sldId id="258" r:id="rId4"/>
-    <p:sldId id="259" r:id="rId5"/>
+    <p:sldId id="256" r:id="rId7"/>
+    <p:sldId id="257" r:id="rId8"/>
+    <p:sldId id="258" r:id="rId9"/>
+    <p:sldId id="259" r:id="rId10"/>
   </p:sldIdLst>
-  <p:sldSz cx="12192000" cy="6858000"/>
+  <p:sldSz cx="12191695" cy="6858000" type="screen4x3"/>
   <p:notesSz cx="6858000" cy="9144000"/>
   <p:defaultTextStyle>
     <a:defPPr>
@@ -107,22 +107,6 @@
       </a:defRPr>
     </a:lvl9pPr>
   </p:defaultTextStyle>
-  <p:extLst>
-    <p:ext uri="{EFAFB233-063F-42B5-8137-9DF3F51BA10A}">
-      <p15:sldGuideLst xmlns:p15="http://schemas.microsoft.com/office/powerpoint/2012/main">
-        <p15:guide id="1" orient="horz" pos="2160">
-          <p15:clr>
-            <a:srgbClr val="A4A3A4"/>
-          </p15:clr>
-        </p15:guide>
-        <p15:guide id="2" pos="2880">
-          <p15:clr>
-            <a:srgbClr val="A4A3A4"/>
-          </p15:clr>
-        </p15:guide>
-      </p15:sldGuideLst>
-    </p:ext>
-  </p:extLst>
 </p:presentation>
 </file>
 
@@ -164,9 +148,10 @@
           <a:lstStyle/>
           <a:p>
             <a:r>
-              <a:rPr lang="en-US"/>
+              <a:rPr lang="en-US" smtClean="0"/>
               <a:t>Click to edit Master title style</a:t>
             </a:r>
+            <a:endParaRPr lang="en-US"/>
           </a:p>
         </p:txBody>
       </p:sp>
@@ -282,9 +267,10 @@
           </a:lstStyle>
           <a:p>
             <a:r>
-              <a:rPr lang="en-US"/>
+              <a:rPr lang="en-US" smtClean="0"/>
               <a:t>Click to edit Master subtitle style</a:t>
             </a:r>
+            <a:endParaRPr lang="en-US"/>
           </a:p>
         </p:txBody>
       </p:sp>
@@ -305,7 +291,7 @@
           <a:p>
             <a:fld id="{5BCAD085-E8A6-8845-BD4E-CB4CCA059FC4}" type="datetimeFigureOut">
               <a:rPr lang="en-US" smtClean="0"/>
-              <a:t>8/13/26</a:t>
+              <a:t>1/27/13</a:t>
             </a:fld>
             <a:endParaRPr lang="en-US"/>
           </a:p>
@@ -399,9 +385,10 @@
           <a:lstStyle/>
           <a:p>
             <a:r>
-              <a:rPr lang="en-US"/>
+              <a:rPr lang="en-US" smtClean="0"/>
               <a:t>Click to edit Master title style</a:t>
             </a:r>
+            <a:endParaRPr lang="en-US"/>
           </a:p>
         </p:txBody>
       </p:sp>
@@ -422,37 +409,38 @@
           <a:p>
             <a:pPr lvl="0"/>
             <a:r>
-              <a:rPr lang="en-US"/>
+              <a:rPr lang="en-US" smtClean="0"/>
               <a:t>Click to edit Master text styles</a:t>
             </a:r>
           </a:p>
           <a:p>
             <a:pPr lvl="1"/>
             <a:r>
-              <a:rPr lang="en-US"/>
+              <a:rPr lang="en-US" smtClean="0"/>
               <a:t>Second level</a:t>
             </a:r>
           </a:p>
           <a:p>
             <a:pPr lvl="2"/>
             <a:r>
-              <a:rPr lang="en-US"/>
+              <a:rPr lang="en-US" smtClean="0"/>
               <a:t>Third level</a:t>
             </a:r>
           </a:p>
           <a:p>
             <a:pPr lvl="3"/>
             <a:r>
-              <a:rPr lang="en-US"/>
+              <a:rPr lang="en-US" smtClean="0"/>
               <a:t>Fourth level</a:t>
             </a:r>
           </a:p>
           <a:p>
             <a:pPr lvl="4"/>
             <a:r>
-              <a:rPr lang="en-US"/>
+              <a:rPr lang="en-US" smtClean="0"/>
               <a:t>Fifth level</a:t>
             </a:r>
+            <a:endParaRPr lang="en-US"/>
           </a:p>
         </p:txBody>
       </p:sp>
@@ -473,7 +461,7 @@
           <a:p>
             <a:fld id="{5BCAD085-E8A6-8845-BD4E-CB4CCA059FC4}" type="datetimeFigureOut">
               <a:rPr lang="en-US" smtClean="0"/>
-              <a:t>8/13/26</a:t>
+              <a:t>1/27/13</a:t>
             </a:fld>
             <a:endParaRPr lang="en-US"/>
           </a:p>
@@ -572,9 +560,10 @@
           <a:lstStyle/>
           <a:p>
             <a:r>
-              <a:rPr lang="en-US"/>
+              <a:rPr lang="en-US" smtClean="0"/>
               <a:t>Click to edit Master title style</a:t>
             </a:r>
+            <a:endParaRPr lang="en-US"/>
           </a:p>
         </p:txBody>
       </p:sp>
@@ -600,37 +589,38 @@
           <a:p>
             <a:pPr lvl="0"/>
             <a:r>
-              <a:rPr lang="en-US"/>
+              <a:rPr lang="en-US" smtClean="0"/>
               <a:t>Click to edit Master text styles</a:t>
             </a:r>
           </a:p>
           <a:p>
             <a:pPr lvl="1"/>
             <a:r>
-              <a:rPr lang="en-US"/>
+              <a:rPr lang="en-US" smtClean="0"/>
               <a:t>Second level</a:t>
             </a:r>
           </a:p>
           <a:p>
             <a:pPr lvl="2"/>
             <a:r>
-              <a:rPr lang="en-US"/>
+              <a:rPr lang="en-US" smtClean="0"/>
               <a:t>Third level</a:t>
             </a:r>
           </a:p>
           <a:p>
             <a:pPr lvl="3"/>
             <a:r>
-              <a:rPr lang="en-US"/>
+              <a:rPr lang="en-US" smtClean="0"/>
               <a:t>Fourth level</a:t>
             </a:r>
           </a:p>
           <a:p>
             <a:pPr lvl="4"/>
             <a:r>
-              <a:rPr lang="en-US"/>
+              <a:rPr lang="en-US" smtClean="0"/>
               <a:t>Fifth level</a:t>
             </a:r>
+            <a:endParaRPr lang="en-US"/>
           </a:p>
         </p:txBody>
       </p:sp>
@@ -651,7 +641,7 @@
           <a:p>
             <a:fld id="{5BCAD085-E8A6-8845-BD4E-CB4CCA059FC4}" type="datetimeFigureOut">
               <a:rPr lang="en-US" smtClean="0"/>
-              <a:t>8/13/26</a:t>
+              <a:t>1/27/13</a:t>
             </a:fld>
             <a:endParaRPr lang="en-US"/>
           </a:p>
@@ -745,9 +735,10 @@
           <a:lstStyle/>
           <a:p>
             <a:r>
-              <a:rPr lang="en-US"/>
+              <a:rPr lang="en-US" smtClean="0"/>
               <a:t>Click to edit Master title style</a:t>
             </a:r>
+            <a:endParaRPr lang="en-US"/>
           </a:p>
         </p:txBody>
       </p:sp>
@@ -768,37 +759,38 @@
           <a:p>
             <a:pPr lvl="0"/>
             <a:r>
-              <a:rPr lang="en-US"/>
+              <a:rPr lang="en-US" smtClean="0"/>
               <a:t>Click to edit Master text styles</a:t>
             </a:r>
           </a:p>
           <a:p>
             <a:pPr lvl="1"/>
             <a:r>
-              <a:rPr lang="en-US"/>
+              <a:rPr lang="en-US" smtClean="0"/>
               <a:t>Second level</a:t>
             </a:r>
           </a:p>
           <a:p>
             <a:pPr lvl="2"/>
             <a:r>
-              <a:rPr lang="en-US"/>
+              <a:rPr lang="en-US" smtClean="0"/>
               <a:t>Third level</a:t>
             </a:r>
           </a:p>
           <a:p>
             <a:pPr lvl="3"/>
             <a:r>
-              <a:rPr lang="en-US"/>
+              <a:rPr lang="en-US" smtClean="0"/>
               <a:t>Fourth level</a:t>
             </a:r>
           </a:p>
           <a:p>
             <a:pPr lvl="4"/>
             <a:r>
-              <a:rPr lang="en-US"/>
+              <a:rPr lang="en-US" smtClean="0"/>
               <a:t>Fifth level</a:t>
             </a:r>
+            <a:endParaRPr lang="en-US"/>
           </a:p>
         </p:txBody>
       </p:sp>
@@ -819,7 +811,7 @@
           <a:p>
             <a:fld id="{5BCAD085-E8A6-8845-BD4E-CB4CCA059FC4}" type="datetimeFigureOut">
               <a:rPr lang="en-US" smtClean="0"/>
-              <a:t>8/13/26</a:t>
+              <a:t>1/27/13</a:t>
             </a:fld>
             <a:endParaRPr lang="en-US"/>
           </a:p>
@@ -922,9 +914,10 @@
           </a:lstStyle>
           <a:p>
             <a:r>
-              <a:rPr lang="en-US"/>
+              <a:rPr lang="en-US" smtClean="0"/>
               <a:t>Click to edit Master title style</a:t>
             </a:r>
+            <a:endParaRPr lang="en-US"/>
           </a:p>
         </p:txBody>
       </p:sp>
@@ -1041,7 +1034,7 @@
           <a:p>
             <a:pPr lvl="0"/>
             <a:r>
-              <a:rPr lang="en-US"/>
+              <a:rPr lang="en-US" smtClean="0"/>
               <a:t>Click to edit Master text styles</a:t>
             </a:r>
           </a:p>
@@ -1064,7 +1057,7 @@
           <a:p>
             <a:fld id="{5BCAD085-E8A6-8845-BD4E-CB4CCA059FC4}" type="datetimeFigureOut">
               <a:rPr lang="en-US" smtClean="0"/>
-              <a:t>8/13/26</a:t>
+              <a:t>1/27/13</a:t>
             </a:fld>
             <a:endParaRPr lang="en-US"/>
           </a:p>
@@ -1158,9 +1151,10 @@
           <a:lstStyle/>
           <a:p>
             <a:r>
-              <a:rPr lang="en-US"/>
+              <a:rPr lang="en-US" smtClean="0"/>
               <a:t>Click to edit Master title style</a:t>
             </a:r>
+            <a:endParaRPr lang="en-US"/>
           </a:p>
         </p:txBody>
       </p:sp>
@@ -1214,37 +1208,38 @@
           <a:p>
             <a:pPr lvl="0"/>
             <a:r>
-              <a:rPr lang="en-US"/>
+              <a:rPr lang="en-US" smtClean="0"/>
               <a:t>Click to edit Master text styles</a:t>
             </a:r>
           </a:p>
           <a:p>
             <a:pPr lvl="1"/>
             <a:r>
-              <a:rPr lang="en-US"/>
+              <a:rPr lang="en-US" smtClean="0"/>
               <a:t>Second level</a:t>
             </a:r>
           </a:p>
           <a:p>
             <a:pPr lvl="2"/>
             <a:r>
-              <a:rPr lang="en-US"/>
+              <a:rPr lang="en-US" smtClean="0"/>
               <a:t>Third level</a:t>
             </a:r>
           </a:p>
           <a:p>
             <a:pPr lvl="3"/>
             <a:r>
-              <a:rPr lang="en-US"/>
+              <a:rPr lang="en-US" smtClean="0"/>
               <a:t>Fourth level</a:t>
             </a:r>
           </a:p>
           <a:p>
             <a:pPr lvl="4"/>
             <a:r>
-              <a:rPr lang="en-US"/>
+              <a:rPr lang="en-US" smtClean="0"/>
               <a:t>Fifth level</a:t>
             </a:r>
+            <a:endParaRPr lang="en-US"/>
           </a:p>
         </p:txBody>
       </p:sp>
@@ -1298,37 +1293,38 @@
           <a:p>
             <a:pPr lvl="0"/>
             <a:r>
-              <a:rPr lang="en-US"/>
+              <a:rPr lang="en-US" smtClean="0"/>
               <a:t>Click to edit Master text styles</a:t>
             </a:r>
           </a:p>
           <a:p>
             <a:pPr lvl="1"/>
             <a:r>
-              <a:rPr lang="en-US"/>
+              <a:rPr lang="en-US" smtClean="0"/>
               <a:t>Second level</a:t>
             </a:r>
           </a:p>
           <a:p>
             <a:pPr lvl="2"/>
             <a:r>
-              <a:rPr lang="en-US"/>
+              <a:rPr lang="en-US" smtClean="0"/>
               <a:t>Third level</a:t>
             </a:r>
           </a:p>
           <a:p>
             <a:pPr lvl="3"/>
             <a:r>
-              <a:rPr lang="en-US"/>
+              <a:rPr lang="en-US" smtClean="0"/>
               <a:t>Fourth level</a:t>
             </a:r>
           </a:p>
           <a:p>
             <a:pPr lvl="4"/>
             <a:r>
-              <a:rPr lang="en-US"/>
+              <a:rPr lang="en-US" smtClean="0"/>
               <a:t>Fifth level</a:t>
             </a:r>
+            <a:endParaRPr lang="en-US"/>
           </a:p>
         </p:txBody>
       </p:sp>
@@ -1349,7 +1345,7 @@
           <a:p>
             <a:fld id="{5BCAD085-E8A6-8845-BD4E-CB4CCA059FC4}" type="datetimeFigureOut">
               <a:rPr lang="en-US" smtClean="0"/>
-              <a:t>8/13/26</a:t>
+              <a:t>1/27/13</a:t>
             </a:fld>
             <a:endParaRPr lang="en-US"/>
           </a:p>
@@ -1447,9 +1443,10 @@
           </a:lstStyle>
           <a:p>
             <a:r>
-              <a:rPr lang="en-US"/>
+              <a:rPr lang="en-US" smtClean="0"/>
               <a:t>Click to edit Master title style</a:t>
             </a:r>
+            <a:endParaRPr lang="en-US"/>
           </a:p>
         </p:txBody>
       </p:sp>
@@ -1512,7 +1509,7 @@
           <a:p>
             <a:pPr lvl="0"/>
             <a:r>
-              <a:rPr lang="en-US"/>
+              <a:rPr lang="en-US" smtClean="0"/>
               <a:t>Click to edit Master text styles</a:t>
             </a:r>
           </a:p>
@@ -1568,37 +1565,38 @@
           <a:p>
             <a:pPr lvl="0"/>
             <a:r>
-              <a:rPr lang="en-US"/>
+              <a:rPr lang="en-US" smtClean="0"/>
               <a:t>Click to edit Master text styles</a:t>
             </a:r>
           </a:p>
           <a:p>
             <a:pPr lvl="1"/>
             <a:r>
-              <a:rPr lang="en-US"/>
+              <a:rPr lang="en-US" smtClean="0"/>
               <a:t>Second level</a:t>
             </a:r>
           </a:p>
           <a:p>
             <a:pPr lvl="2"/>
             <a:r>
-              <a:rPr lang="en-US"/>
+              <a:rPr lang="en-US" smtClean="0"/>
               <a:t>Third level</a:t>
             </a:r>
           </a:p>
           <a:p>
             <a:pPr lvl="3"/>
             <a:r>
-              <a:rPr lang="en-US"/>
+              <a:rPr lang="en-US" smtClean="0"/>
               <a:t>Fourth level</a:t>
             </a:r>
           </a:p>
           <a:p>
             <a:pPr lvl="4"/>
             <a:r>
-              <a:rPr lang="en-US"/>
+              <a:rPr lang="en-US" smtClean="0"/>
               <a:t>Fifth level</a:t>
             </a:r>
+            <a:endParaRPr lang="en-US"/>
           </a:p>
         </p:txBody>
       </p:sp>
@@ -1661,7 +1659,7 @@
           <a:p>
             <a:pPr lvl="0"/>
             <a:r>
-              <a:rPr lang="en-US"/>
+              <a:rPr lang="en-US" smtClean="0"/>
               <a:t>Click to edit Master text styles</a:t>
             </a:r>
           </a:p>
@@ -1717,37 +1715,38 @@
           <a:p>
             <a:pPr lvl="0"/>
             <a:r>
-              <a:rPr lang="en-US"/>
+              <a:rPr lang="en-US" smtClean="0"/>
               <a:t>Click to edit Master text styles</a:t>
             </a:r>
           </a:p>
           <a:p>
             <a:pPr lvl="1"/>
             <a:r>
-              <a:rPr lang="en-US"/>
+              <a:rPr lang="en-US" smtClean="0"/>
               <a:t>Second level</a:t>
             </a:r>
           </a:p>
           <a:p>
             <a:pPr lvl="2"/>
             <a:r>
-              <a:rPr lang="en-US"/>
+              <a:rPr lang="en-US" smtClean="0"/>
               <a:t>Third level</a:t>
             </a:r>
           </a:p>
           <a:p>
             <a:pPr lvl="3"/>
             <a:r>
-              <a:rPr lang="en-US"/>
+              <a:rPr lang="en-US" smtClean="0"/>
               <a:t>Fourth level</a:t>
             </a:r>
           </a:p>
           <a:p>
             <a:pPr lvl="4"/>
             <a:r>
-              <a:rPr lang="en-US"/>
+              <a:rPr lang="en-US" smtClean="0"/>
               <a:t>Fifth level</a:t>
             </a:r>
+            <a:endParaRPr lang="en-US"/>
           </a:p>
         </p:txBody>
       </p:sp>
@@ -1768,7 +1767,7 @@
           <a:p>
             <a:fld id="{5BCAD085-E8A6-8845-BD4E-CB4CCA059FC4}" type="datetimeFigureOut">
               <a:rPr lang="en-US" smtClean="0"/>
-              <a:t>8/13/26</a:t>
+              <a:t>1/27/13</a:t>
             </a:fld>
             <a:endParaRPr lang="en-US"/>
           </a:p>
@@ -1862,9 +1861,10 @@
           <a:lstStyle/>
           <a:p>
             <a:r>
-              <a:rPr lang="en-US"/>
+              <a:rPr lang="en-US" smtClean="0"/>
               <a:t>Click to edit Master title style</a:t>
             </a:r>
+            <a:endParaRPr lang="en-US"/>
           </a:p>
         </p:txBody>
       </p:sp>
@@ -1885,7 +1885,7 @@
           <a:p>
             <a:fld id="{5BCAD085-E8A6-8845-BD4E-CB4CCA059FC4}" type="datetimeFigureOut">
               <a:rPr lang="en-US" smtClean="0"/>
-              <a:t>8/13/26</a:t>
+              <a:t>1/27/13</a:t>
             </a:fld>
             <a:endParaRPr lang="en-US"/>
           </a:p>
@@ -1980,7 +1980,7 @@
           <a:p>
             <a:fld id="{5BCAD085-E8A6-8845-BD4E-CB4CCA059FC4}" type="datetimeFigureOut">
               <a:rPr lang="en-US" smtClean="0"/>
-              <a:t>8/13/26</a:t>
+              <a:t>1/27/13</a:t>
             </a:fld>
             <a:endParaRPr lang="en-US"/>
           </a:p>
@@ -2083,9 +2083,10 @@
           </a:lstStyle>
           <a:p>
             <a:r>
-              <a:rPr lang="en-US"/>
+              <a:rPr lang="en-US" smtClean="0"/>
               <a:t>Click to edit Master title style</a:t>
             </a:r>
+            <a:endParaRPr lang="en-US"/>
           </a:p>
         </p:txBody>
       </p:sp>
@@ -2139,37 +2140,38 @@
           <a:p>
             <a:pPr lvl="0"/>
             <a:r>
-              <a:rPr lang="en-US"/>
+              <a:rPr lang="en-US" smtClean="0"/>
               <a:t>Click to edit Master text styles</a:t>
             </a:r>
           </a:p>
           <a:p>
             <a:pPr lvl="1"/>
             <a:r>
-              <a:rPr lang="en-US"/>
+              <a:rPr lang="en-US" smtClean="0"/>
               <a:t>Second level</a:t>
             </a:r>
           </a:p>
           <a:p>
             <a:pPr lvl="2"/>
             <a:r>
-              <a:rPr lang="en-US"/>
+              <a:rPr lang="en-US" smtClean="0"/>
               <a:t>Third level</a:t>
             </a:r>
           </a:p>
           <a:p>
             <a:pPr lvl="3"/>
             <a:r>
-              <a:rPr lang="en-US"/>
+              <a:rPr lang="en-US" smtClean="0"/>
               <a:t>Fourth level</a:t>
             </a:r>
           </a:p>
           <a:p>
             <a:pPr lvl="4"/>
             <a:r>
-              <a:rPr lang="en-US"/>
+              <a:rPr lang="en-US" smtClean="0"/>
               <a:t>Fifth level</a:t>
             </a:r>
+            <a:endParaRPr lang="en-US"/>
           </a:p>
         </p:txBody>
       </p:sp>
@@ -2232,7 +2234,7 @@
           <a:p>
             <a:pPr lvl="0"/>
             <a:r>
-              <a:rPr lang="en-US"/>
+              <a:rPr lang="en-US" smtClean="0"/>
               <a:t>Click to edit Master text styles</a:t>
             </a:r>
           </a:p>
@@ -2255,7 +2257,7 @@
           <a:p>
             <a:fld id="{5BCAD085-E8A6-8845-BD4E-CB4CCA059FC4}" type="datetimeFigureOut">
               <a:rPr lang="en-US" smtClean="0"/>
-              <a:t>8/13/26</a:t>
+              <a:t>1/27/13</a:t>
             </a:fld>
             <a:endParaRPr lang="en-US"/>
           </a:p>
@@ -2358,9 +2360,10 @@
           </a:lstStyle>
           <a:p>
             <a:r>
-              <a:rPr lang="en-US"/>
+              <a:rPr lang="en-US" smtClean="0"/>
               <a:t>Click to edit Master title style</a:t>
             </a:r>
+            <a:endParaRPr lang="en-US"/>
           </a:p>
         </p:txBody>
       </p:sp>
@@ -2484,7 +2487,7 @@
           <a:p>
             <a:pPr lvl="0"/>
             <a:r>
-              <a:rPr lang="en-US"/>
+              <a:rPr lang="en-US" smtClean="0"/>
               <a:t>Click to edit Master text styles</a:t>
             </a:r>
           </a:p>
@@ -2507,7 +2510,7 @@
           <a:p>
             <a:fld id="{5BCAD085-E8A6-8845-BD4E-CB4CCA059FC4}" type="datetimeFigureOut">
               <a:rPr lang="en-US" smtClean="0"/>
-              <a:t>8/13/26</a:t>
+              <a:t>1/27/13</a:t>
             </a:fld>
             <a:endParaRPr lang="en-US"/>
           </a:p>
@@ -2616,9 +2619,10 @@
           <a:lstStyle/>
           <a:p>
             <a:r>
-              <a:rPr lang="en-US"/>
+              <a:rPr lang="en-US" smtClean="0"/>
               <a:t>Click to edit Master title style</a:t>
             </a:r>
+            <a:endParaRPr lang="en-US"/>
           </a:p>
         </p:txBody>
       </p:sp>
@@ -2649,37 +2653,38 @@
           <a:p>
             <a:pPr lvl="0"/>
             <a:r>
-              <a:rPr lang="en-US"/>
+              <a:rPr lang="en-US" smtClean="0"/>
               <a:t>Click to edit Master text styles</a:t>
             </a:r>
           </a:p>
           <a:p>
             <a:pPr lvl="1"/>
             <a:r>
-              <a:rPr lang="en-US"/>
+              <a:rPr lang="en-US" smtClean="0"/>
               <a:t>Second level</a:t>
             </a:r>
           </a:p>
           <a:p>
             <a:pPr lvl="2"/>
             <a:r>
-              <a:rPr lang="en-US"/>
+              <a:rPr lang="en-US" smtClean="0"/>
               <a:t>Third level</a:t>
             </a:r>
           </a:p>
           <a:p>
             <a:pPr lvl="3"/>
             <a:r>
-              <a:rPr lang="en-US"/>
+              <a:rPr lang="en-US" smtClean="0"/>
               <a:t>Fourth level</a:t>
             </a:r>
           </a:p>
           <a:p>
             <a:pPr lvl="4"/>
             <a:r>
-              <a:rPr lang="en-US"/>
+              <a:rPr lang="en-US" smtClean="0"/>
               <a:t>Fifth level</a:t>
             </a:r>
+            <a:endParaRPr lang="en-US"/>
           </a:p>
         </p:txBody>
       </p:sp>
@@ -2718,7 +2723,7 @@
           <a:p>
             <a:fld id="{5BCAD085-E8A6-8845-BD4E-CB4CCA059FC4}" type="datetimeFigureOut">
               <a:rPr lang="en-US" smtClean="0"/>
-              <a:t>8/13/26</a:t>
+              <a:t>1/27/13</a:t>
             </a:fld>
             <a:endParaRPr lang="en-US"/>
           </a:p>
@@ -3077,7 +3082,7 @@
 </file>
 
 <file path=ppt/slides/slide1.xml><?xml version="1.0" encoding="utf-8"?>
-<p:sld xmlns:a="http://schemas.openxmlformats.org/drawingml/2006/main" xmlns:r="http://schemas.openxmlformats.org/officeDocument/2006/relationships" xmlns:p="http://schemas.openxmlformats.org/presentationml/2006/main">
+<p:sld xmlns:a="http://schemas.openxmlformats.org/drawingml/2006/main" xmlns:p="http://schemas.openxmlformats.org/presentationml/2006/main" xmlns:r="http://schemas.openxmlformats.org/officeDocument/2006/relationships">
   <p:cSld>
     <p:spTree>
       <p:nvGrpSpPr>
@@ -3085,830 +3090,212 @@
         <p:cNvGrpSpPr/>
         <p:nvPr/>
       </p:nvGrpSpPr>
-      <p:grpSpPr>
-        <a:xfrm>
-          <a:off x="0" y="0"/>
-          <a:ext cx="0" cy="0"/>
-          <a:chOff x="0" y="0"/>
-          <a:chExt cx="0" cy="0"/>
-        </a:xfrm>
-      </p:grpSpPr>
-      <mc:AlternateContent xmlns:mc="http://schemas.openxmlformats.org/markup-compatibility/2006">
-        <mc:Choice xmlns:a14="http://schemas.microsoft.com/office/drawing/2010/main" Requires="a14">
-          <p:sp>
-            <p:nvSpPr>
-              <p:cNvPr id="2" name="TextBox 1"/>
-              <p:cNvSpPr txBox="1"/>
-              <p:nvPr/>
-            </p:nvSpPr>
-            <p:spPr>
-              <a:xfrm>
-                <a:off x="384048" y="219456"/>
-                <a:ext cx="4220707" cy="400110"/>
-              </a:xfrm>
-              <a:prstGeom prst="rect">
-                <a:avLst/>
-              </a:prstGeom>
-              <a:noFill/>
-            </p:spPr>
-            <p:txBody>
-              <a:bodyPr wrap="none">
-                <a:spAutoFit/>
-              </a:bodyPr>
-              <a:lstStyle/>
-              <a:p>
-                <a:r>
-                  <a:rPr sz="2000" b="1" i="0" baseline="0" dirty="0">
-                    <a:latin typeface="Calibri"/>
-                  </a:rPr>
-                  <a:t>PD20 — Gibbs SELECT (temperature </a:t>
-                </a:r>
-                <a14:m>
-                  <m:oMath xmlns:m="http://schemas.openxmlformats.org/officeDocument/2006/math">
-                    <m:r>
-                      <a:rPr lang="en-US" sz="2000" b="1" i="0" baseline="0" dirty="0" smtClean="0">
-                        <a:latin typeface="Cambria Math" panose="02040503050406030204" pitchFamily="18" charset="0"/>
-                      </a:rPr>
-                      <m:t>𝑡</m:t>
-                    </m:r>
-                  </m:oMath>
-                </a14:m>
-                <a:r>
-                  <a:rPr sz="2000" b="1" i="0" baseline="0" dirty="0">
-                    <a:latin typeface="Calibri"/>
-                  </a:rPr>
-                  <a:t>)</a:t>
-                </a:r>
-              </a:p>
-            </p:txBody>
-          </p:sp>
-        </mc:Choice>
-        <mc:Fallback>
-          <p:sp>
-            <p:nvSpPr>
-              <p:cNvPr id="2" name="TextBox 1"/>
-              <p:cNvSpPr txBox="1">
-                <a:spLocks noRot="1" noChangeAspect="1" noMove="1" noResize="1" noEditPoints="1" noAdjustHandles="1" noChangeArrowheads="1" noChangeShapeType="1" noTextEdit="1"/>
-              </p:cNvSpPr>
-              <p:nvPr/>
-            </p:nvSpPr>
-            <p:spPr>
-              <a:xfrm>
-                <a:off x="384048" y="219456"/>
-                <a:ext cx="4220707" cy="400110"/>
-              </a:xfrm>
-              <a:prstGeom prst="rect">
-                <a:avLst/>
-              </a:prstGeom>
-              <a:blipFill>
-                <a:blip r:embed="rId2"/>
-                <a:stretch>
-                  <a:fillRect l="-1502" t="-9375" r="-601" b="-28125"/>
-                </a:stretch>
-              </a:blipFill>
-            </p:spPr>
-            <p:txBody>
-              <a:bodyPr/>
-              <a:lstStyle/>
-              <a:p>
-                <a:r>
-                  <a:rPr lang="en-US">
-                    <a:noFill/>
-                  </a:rPr>
-                  <a:t> </a:t>
-                </a:r>
-              </a:p>
-            </p:txBody>
-          </p:sp>
-        </mc:Fallback>
-      </mc:AlternateContent>
-      <mc:AlternateContent xmlns:mc="http://schemas.openxmlformats.org/markup-compatibility/2006">
-        <mc:Choice xmlns:a14="http://schemas.microsoft.com/office/drawing/2010/main" Requires="a14">
-          <p:sp>
-            <p:nvSpPr>
-              <p:cNvPr id="3" name="TextBox 2"/>
-              <p:cNvSpPr txBox="1"/>
-              <p:nvPr/>
-            </p:nvSpPr>
-            <p:spPr>
-              <a:xfrm>
-                <a:off x="384048" y="713232"/>
-                <a:ext cx="2981009" cy="246221"/>
-              </a:xfrm>
-              <a:prstGeom prst="rect">
-                <a:avLst/>
-              </a:prstGeom>
-              <a:noFill/>
-            </p:spPr>
-            <p:txBody>
-              <a:bodyPr wrap="none">
-                <a:spAutoFit/>
-              </a:bodyPr>
-              <a:lstStyle/>
-              <a:p>
-                <a:r>
-                  <a:rPr sz="1000" b="0" i="0" baseline="0" dirty="0">
-                    <a:latin typeface="Calibri"/>
-                  </a:rPr>
-                  <a:t>MBB empirical caps · </a:t>
-                </a:r>
-                <a14:m>
-                  <m:oMath xmlns:m="http://schemas.openxmlformats.org/officeDocument/2006/math">
-                    <m:r>
-                      <a:rPr lang="en-US" sz="1000" b="0" i="0" baseline="0" dirty="0" smtClean="0">
-                        <a:latin typeface="Cambria Math" panose="02040503050406030204" pitchFamily="18" charset="0"/>
-                      </a:rPr>
-                      <m:t>𝜌</m:t>
-                    </m:r>
-                    <m:r>
-                      <a:rPr lang="en-US" sz="1000" b="0" i="0" baseline="0" dirty="0" smtClean="0">
-                        <a:latin typeface="Cambria Math" panose="02040503050406030204" pitchFamily="18" charset="0"/>
-                      </a:rPr>
-                      <m:t>=0.5</m:t>
-                    </m:r>
-                  </m:oMath>
-                </a14:m>
-                <a:r>
-                  <a:rPr sz="1000" b="0" i="0" baseline="0" dirty="0">
-                    <a:latin typeface="Calibri"/>
-                  </a:rPr>
-                  <a:t> · inverted-U before MLE</a:t>
-                </a:r>
-              </a:p>
-            </p:txBody>
-          </p:sp>
-        </mc:Choice>
-        <mc:Fallback>
-          <p:sp>
-            <p:nvSpPr>
-              <p:cNvPr id="3" name="TextBox 2"/>
-              <p:cNvSpPr txBox="1">
-                <a:spLocks noRot="1" noChangeAspect="1" noMove="1" noResize="1" noEditPoints="1" noAdjustHandles="1" noChangeArrowheads="1" noChangeShapeType="1" noTextEdit="1"/>
-              </p:cNvSpPr>
-              <p:nvPr/>
-            </p:nvSpPr>
-            <p:spPr>
-              <a:xfrm>
-                <a:off x="384048" y="713232"/>
-                <a:ext cx="2981009" cy="246221"/>
-              </a:xfrm>
-              <a:prstGeom prst="rect">
-                <a:avLst/>
-              </a:prstGeom>
-              <a:blipFill>
-                <a:blip r:embed="rId3"/>
-                <a:stretch>
-                  <a:fillRect b="-10000"/>
-                </a:stretch>
-              </a:blipFill>
-            </p:spPr>
-            <p:txBody>
-              <a:bodyPr/>
-              <a:lstStyle/>
-              <a:p>
-                <a:r>
-                  <a:rPr lang="en-US">
-                    <a:noFill/>
-                  </a:rPr>
-                  <a:t> </a:t>
-                </a:r>
-              </a:p>
-            </p:txBody>
-          </p:sp>
-        </mc:Fallback>
-      </mc:AlternateContent>
-      <mc:AlternateContent xmlns:mc="http://schemas.openxmlformats.org/markup-compatibility/2006">
-        <mc:Choice xmlns:a14="http://schemas.microsoft.com/office/drawing/2010/main" Requires="a14">
-          <p:sp>
-            <p:nvSpPr>
-              <p:cNvPr id="4" name="TextBox 3"/>
-              <p:cNvSpPr txBox="1"/>
-              <p:nvPr/>
-            </p:nvSpPr>
-            <p:spPr>
-              <a:xfrm>
-                <a:off x="384048" y="1033272"/>
-                <a:ext cx="11423599" cy="4540474"/>
-              </a:xfrm>
-              <a:prstGeom prst="rect">
-                <a:avLst/>
-              </a:prstGeom>
-              <a:noFill/>
-            </p:spPr>
-            <p:txBody>
-              <a:bodyPr wrap="square">
-                <a:spAutoFit/>
-              </a:bodyPr>
-              <a:lstStyle/>
-              <a:p>
-                <a:pPr>
-                  <a:lnSpc>
-                    <a:spcPct val="200000"/>
-                  </a:lnSpc>
-                  <a:buChar char="•"/>
-                </a:pPr>
-                <a:r>
-                  <a:rPr sz="2400" b="0" i="0" baseline="0" dirty="0">
-                    <a:latin typeface="Calibri"/>
-                  </a:rPr>
-                  <a:t>  PD20: replace deterministic top-</a:t>
-                </a:r>
-                <a14:m>
-                  <m:oMath xmlns:m="http://schemas.openxmlformats.org/officeDocument/2006/math">
-                    <m:r>
-                      <a:rPr lang="en-US" sz="2400" b="0" i="0" baseline="0" dirty="0" smtClean="0">
-                        <a:latin typeface="Cambria Math" panose="02040503050406030204" pitchFamily="18" charset="0"/>
-                      </a:rPr>
-                      <m:t>𝐾</m:t>
-                    </m:r>
-                  </m:oMath>
-                </a14:m>
-                <a:r>
-                  <a:rPr sz="2400" b="0" i="0" baseline="0" dirty="0">
-                    <a:latin typeface="Calibri"/>
-                  </a:rPr>
-                  <a:t> SELECT with Gibbs rule on </a:t>
-                </a:r>
-                <a14:m>
-                  <m:oMath xmlns:m="http://schemas.openxmlformats.org/officeDocument/2006/math">
-                    <m:sSub>
-                      <m:sSubPr>
-                        <m:ctrlPr>
-                          <a:rPr lang="en-US" sz="2400" b="0" i="0" baseline="0" dirty="0">
-                            <a:latin typeface="Cambria Math" panose="02040503050406030204" pitchFamily="18" charset="0"/>
-                          </a:rPr>
-                        </m:ctrlPr>
-                      </m:sSubPr>
-                      <m:e>
-                        <m:r>
-                          <a:rPr lang="en-US" sz="2400" b="0" i="0" baseline="0" dirty="0">
-                            <a:latin typeface="Cambria Math" panose="02040503050406030204" pitchFamily="18" charset="0"/>
-                          </a:rPr>
-                          <m:t>𝑆</m:t>
-                        </m:r>
-                      </m:e>
-                      <m:sub>
-                        <m:r>
-                          <a:rPr lang="en-US" sz="2400" b="0" i="0" baseline="0" dirty="0">
-                            <a:latin typeface="Cambria Math" panose="02040503050406030204" pitchFamily="18" charset="0"/>
-                          </a:rPr>
-                          <m:t>𝑖</m:t>
-                        </m:r>
-                      </m:sub>
-                    </m:sSub>
-                  </m:oMath>
-                </a14:m>
-                <a:r>
-                  <a:rPr sz="2400" b="0" i="0" baseline="0" dirty="0">
-                    <a:latin typeface="Calibri"/>
-                  </a:rPr>
-                  <a:t>.</a:t>
-                </a:r>
-              </a:p>
-              <a:p>
-                <a:pPr>
-                  <a:lnSpc>
-                    <a:spcPct val="200000"/>
-                  </a:lnSpc>
-                  <a:buChar char="•"/>
-                </a:pPr>
-                <a:r>
-                  <a:rPr sz="2400" b="0" i="0" baseline="0" dirty="0">
-                    <a:latin typeface="Calibri"/>
-                  </a:rPr>
-                  <a:t>  Lock: </a:t>
-                </a:r>
-                <a14:m>
-                  <m:oMath xmlns:m="http://schemas.openxmlformats.org/officeDocument/2006/math">
-                    <m:sSub>
-                      <m:sSubPr>
-                        <m:ctrlPr>
-                          <a:rPr lang="en-US" sz="2400" b="0" i="0" baseline="0" dirty="0">
-                            <a:latin typeface="Cambria Math" panose="02040503050406030204" pitchFamily="18" charset="0"/>
-                          </a:rPr>
-                        </m:ctrlPr>
-                      </m:sSubPr>
-                      <m:e>
-                        <m:r>
-                          <a:rPr lang="en-US" sz="2400" b="0" i="0" baseline="0" dirty="0">
-                            <a:latin typeface="Cambria Math" panose="02040503050406030204" pitchFamily="18" charset="0"/>
-                          </a:rPr>
-                          <m:t>𝑃</m:t>
-                        </m:r>
-                      </m:e>
-                      <m:sub>
-                        <m:r>
-                          <a:rPr lang="en-US" sz="2400" b="0" i="0" baseline="0" dirty="0">
-                            <a:latin typeface="Cambria Math" panose="02040503050406030204" pitchFamily="18" charset="0"/>
-                          </a:rPr>
-                          <m:t>𝑖</m:t>
-                        </m:r>
-                      </m:sub>
-                    </m:sSub>
-                    <m:r>
-                      <a:rPr lang="en-US" sz="2400" b="0" i="0" baseline="0" dirty="0">
-                        <a:latin typeface="Cambria Math" panose="02040503050406030204" pitchFamily="18" charset="0"/>
-                      </a:rPr>
-                      <m:t>∝</m:t>
-                    </m:r>
-                    <m:func>
-                      <m:funcPr>
-                        <m:ctrlPr>
-                          <a:rPr lang="en-US" sz="2400" b="0" i="0" baseline="0" dirty="0">
-                            <a:latin typeface="Cambria Math" panose="02040503050406030204" pitchFamily="18" charset="0"/>
-                          </a:rPr>
-                        </m:ctrlPr>
-                      </m:funcPr>
-                      <m:fName>
-                        <m:r>
-                          <m:rPr>
-                            <m:sty m:val="p"/>
-                          </m:rPr>
-                          <a:rPr lang="en-US" sz="2400" b="0" i="0" baseline="0" dirty="0">
-                            <a:latin typeface="Cambria Math" panose="02040503050406030204" pitchFamily="18" charset="0"/>
-                          </a:rPr>
-                          <m:t>exp</m:t>
-                        </m:r>
-                      </m:fName>
-                      <m:e>
-                        <m:d>
-                          <m:dPr>
-                            <m:ctrlPr>
-                              <a:rPr lang="en-US" sz="2400" b="0" i="0" baseline="0" dirty="0">
-                                <a:latin typeface="Cambria Math" panose="02040503050406030204" pitchFamily="18" charset="0"/>
-                              </a:rPr>
-                            </m:ctrlPr>
-                          </m:dPr>
-                          <m:e>
-                            <m:sSub>
-                              <m:sSubPr>
-                                <m:ctrlPr>
-                                  <a:rPr lang="en-US" sz="2400" b="0" i="0" baseline="0" dirty="0">
-                                    <a:latin typeface="Cambria Math" panose="02040503050406030204" pitchFamily="18" charset="0"/>
-                                  </a:rPr>
-                                </m:ctrlPr>
-                              </m:sSubPr>
-                              <m:e>
-                                <m:r>
-                                  <a:rPr lang="en-US" sz="2400" b="0" i="0" baseline="0" dirty="0">
-                                    <a:latin typeface="Cambria Math" panose="02040503050406030204" pitchFamily="18" charset="0"/>
-                                  </a:rPr>
-                                  <m:t>𝑆</m:t>
-                                </m:r>
-                              </m:e>
-                              <m:sub>
-                                <m:r>
-                                  <a:rPr lang="en-US" sz="2400" b="0" i="0" baseline="0" dirty="0">
-                                    <a:latin typeface="Cambria Math" panose="02040503050406030204" pitchFamily="18" charset="0"/>
-                                  </a:rPr>
-                                  <m:t>𝑖</m:t>
-                                </m:r>
-                              </m:sub>
-                            </m:sSub>
-                            <m:r>
-                              <a:rPr lang="en-US" sz="2400" b="0" i="0" baseline="0" dirty="0">
-                                <a:latin typeface="Cambria Math" panose="02040503050406030204" pitchFamily="18" charset="0"/>
-                              </a:rPr>
-                              <m:t>/</m:t>
-                            </m:r>
-                            <m:r>
-                              <a:rPr lang="en-US" sz="2400" b="0" i="0" baseline="0" dirty="0">
-                                <a:latin typeface="Cambria Math" panose="02040503050406030204" pitchFamily="18" charset="0"/>
-                              </a:rPr>
-                              <m:t>𝑡</m:t>
-                            </m:r>
-                          </m:e>
-                        </m:d>
-                      </m:e>
-                    </m:func>
-                  </m:oMath>
-                </a14:m>
-                <a:r>
-                  <a:rPr sz="2400" b="0" i="0" baseline="0" dirty="0">
-                    <a:latin typeface="Calibri"/>
-                  </a:rPr>
-                  <a:t> with </a:t>
-                </a:r>
-                <a14:m>
-                  <m:oMath xmlns:m="http://schemas.openxmlformats.org/officeDocument/2006/math">
-                    <m:r>
-                      <a:rPr lang="en-US" sz="2400" b="0" i="0" baseline="0" dirty="0" smtClean="0">
-                        <a:latin typeface="Cambria Math" panose="02040503050406030204" pitchFamily="18" charset="0"/>
-                      </a:rPr>
-                      <m:t>𝑡</m:t>
-                    </m:r>
-                  </m:oMath>
-                </a14:m>
-                <a:r>
-                  <a:rPr sz="2400" b="0" i="0" baseline="0" dirty="0">
-                    <a:latin typeface="Calibri"/>
-                  </a:rPr>
-                  <a:t> in the denominator (stat-</a:t>
-                </a:r>
-                <a:r>
-                  <a:rPr sz="2400" b="0" i="0" baseline="0" dirty="0" err="1">
-                    <a:latin typeface="Calibri"/>
-                  </a:rPr>
-                  <a:t>phys</a:t>
-                </a:r>
-                <a:r>
-                  <a:rPr sz="2400" b="0" i="0" baseline="0" dirty="0">
-                    <a:latin typeface="Calibri"/>
-                  </a:rPr>
-                  <a:t>).</a:t>
-                </a:r>
-              </a:p>
-              <a:p>
-                <a:pPr>
-                  <a:lnSpc>
-                    <a:spcPct val="200000"/>
-                  </a:lnSpc>
-                  <a:buChar char="•"/>
-                </a:pPr>
-                <a:r>
-                  <a:rPr sz="2400" b="0" i="0" baseline="0" dirty="0">
-                    <a:latin typeface="Calibri"/>
-                  </a:rPr>
-                  <a:t>  Sim bridge: rule D = Gibbs weights + </a:t>
-                </a:r>
-                <a14:m>
-                  <m:oMath xmlns:m="http://schemas.openxmlformats.org/officeDocument/2006/math">
-                    <m:r>
-                      <a:rPr lang="en-US" sz="2400" b="0" i="0" baseline="0" dirty="0" smtClean="0">
-                        <a:latin typeface="Cambria Math" panose="02040503050406030204" pitchFamily="18" charset="0"/>
-                      </a:rPr>
-                      <m:t>𝐾</m:t>
-                    </m:r>
-                  </m:oMath>
-                </a14:m>
-                <a:r>
-                  <a:rPr sz="2400" b="0" i="0" baseline="0" dirty="0">
-                    <a:latin typeface="Calibri"/>
-                  </a:rPr>
-                  <a:t> draws without replacement.</a:t>
-                </a:r>
-              </a:p>
-              <a:p>
-                <a:pPr>
-                  <a:lnSpc>
-                    <a:spcPct val="200000"/>
-                  </a:lnSpc>
-                  <a:buChar char="•"/>
-                </a:pPr>
-                <a:r>
-                  <a:rPr sz="2400" b="0" i="0" baseline="0" dirty="0">
-                    <a:latin typeface="Calibri"/>
-                  </a:rPr>
-                  <a:t>  SCORE unchanged: </a:t>
-                </a:r>
-                <a14:m>
-                  <m:oMath xmlns:m="http://schemas.openxmlformats.org/officeDocument/2006/math">
-                    <m:sSub>
-                      <m:sSubPr>
-                        <m:ctrlPr>
-                          <a:rPr lang="en-US" sz="2400" b="0" i="0" baseline="0" dirty="0">
-                            <a:latin typeface="Cambria Math" panose="02040503050406030204" pitchFamily="18" charset="0"/>
-                          </a:rPr>
-                        </m:ctrlPr>
-                      </m:sSubPr>
-                      <m:e>
-                        <m:r>
-                          <a:rPr lang="en-US" sz="2400" b="0" i="0" baseline="0" dirty="0">
-                            <a:latin typeface="Cambria Math" panose="02040503050406030204" pitchFamily="18" charset="0"/>
-                          </a:rPr>
-                          <m:t>𝑆</m:t>
-                        </m:r>
-                      </m:e>
-                      <m:sub>
-                        <m:r>
-                          <a:rPr lang="en-US" sz="2400" b="0" i="0" baseline="0" dirty="0">
-                            <a:latin typeface="Cambria Math" panose="02040503050406030204" pitchFamily="18" charset="0"/>
-                          </a:rPr>
-                          <m:t>𝑖</m:t>
-                        </m:r>
-                      </m:sub>
-                    </m:sSub>
-                    <m:r>
-                      <a:rPr lang="en-US" sz="2400" b="0" i="0" baseline="0" dirty="0">
-                        <a:latin typeface="Cambria Math" panose="02040503050406030204" pitchFamily="18" charset="0"/>
-                      </a:rPr>
-                      <m:t>=</m:t>
-                    </m:r>
-                    <m:sSub>
-                      <m:sSubPr>
-                        <m:ctrlPr>
-                          <a:rPr lang="en-US" sz="2400" b="0" i="0" baseline="0" dirty="0">
-                            <a:latin typeface="Cambria Math" panose="02040503050406030204" pitchFamily="18" charset="0"/>
-                          </a:rPr>
-                        </m:ctrlPr>
-                      </m:sSubPr>
-                      <m:e>
-                        <m:acc>
-                          <m:accPr>
-                            <m:chr m:val="ˆ"/>
-                            <m:ctrlPr>
-                              <a:rPr lang="en-US" sz="2400" b="0" i="0" baseline="0" dirty="0">
-                                <a:latin typeface="Cambria Math" panose="02040503050406030204" pitchFamily="18" charset="0"/>
-                              </a:rPr>
-                            </m:ctrlPr>
-                          </m:accPr>
-                          <m:e>
-                            <m:r>
-                              <a:rPr lang="en-US" sz="2400" b="0" i="0" baseline="0" dirty="0">
-                                <a:latin typeface="Cambria Math" panose="02040503050406030204" pitchFamily="18" charset="0"/>
-                              </a:rPr>
-                              <m:t>𝐴</m:t>
-                            </m:r>
-                          </m:e>
-                        </m:acc>
-                      </m:e>
-                      <m:sub>
-                        <m:r>
-                          <a:rPr lang="en-US" sz="2400" b="0" i="0" baseline="0" dirty="0">
-                            <a:latin typeface="Cambria Math" panose="02040503050406030204" pitchFamily="18" charset="0"/>
-                          </a:rPr>
-                          <m:t>𝑖</m:t>
-                        </m:r>
-                      </m:sub>
-                    </m:sSub>
-                    <m:r>
-                      <a:rPr lang="en-US" sz="2400" b="0" i="0" baseline="0" dirty="0">
-                        <a:latin typeface="Cambria Math" panose="02040503050406030204" pitchFamily="18" charset="0"/>
-                      </a:rPr>
-                      <m:t>−</m:t>
-                    </m:r>
-                    <m:r>
-                      <a:rPr lang="en-US" sz="2400" b="0" i="0" baseline="0" dirty="0">
-                        <a:latin typeface="Cambria Math" panose="02040503050406030204" pitchFamily="18" charset="0"/>
-                      </a:rPr>
-                      <m:t>𝜆</m:t>
-                    </m:r>
-                    <m:sSub>
-                      <m:sSubPr>
-                        <m:ctrlPr>
-                          <a:rPr lang="en-US" sz="2400" b="0" i="0" baseline="0" dirty="0">
-                            <a:latin typeface="Cambria Math" panose="02040503050406030204" pitchFamily="18" charset="0"/>
-                          </a:rPr>
-                        </m:ctrlPr>
-                      </m:sSubPr>
-                      <m:e>
-                        <m:r>
-                          <a:rPr lang="en-US" sz="2400" b="0" i="0" baseline="0" dirty="0">
-                            <a:latin typeface="Cambria Math" panose="02040503050406030204" pitchFamily="18" charset="0"/>
-                          </a:rPr>
-                          <m:t>𝐿</m:t>
-                        </m:r>
-                      </m:e>
-                      <m:sub>
-                        <m:r>
-                          <a:rPr lang="en-US" sz="2400" b="0" i="0" baseline="0" dirty="0">
-                            <a:latin typeface="Cambria Math" panose="02040503050406030204" pitchFamily="18" charset="0"/>
-                          </a:rPr>
-                          <m:t>𝐶</m:t>
-                        </m:r>
-                        <m:r>
-                          <a:rPr lang="en-US" sz="2400" b="0" i="0" baseline="0" dirty="0">
-                            <a:latin typeface="Cambria Math" panose="02040503050406030204" pitchFamily="18" charset="0"/>
-                          </a:rPr>
-                          <m:t>,</m:t>
-                        </m:r>
-                        <m:r>
-                          <a:rPr lang="en-US" sz="2400" b="0" i="0" baseline="0" dirty="0">
-                            <a:latin typeface="Cambria Math" panose="02040503050406030204" pitchFamily="18" charset="0"/>
-                          </a:rPr>
-                          <m:t>𝑔</m:t>
-                        </m:r>
-                        <m:d>
-                          <m:dPr>
-                            <m:ctrlPr>
-                              <a:rPr lang="en-US" sz="2400" b="0" i="0" baseline="0" dirty="0">
-                                <a:latin typeface="Cambria Math" panose="02040503050406030204" pitchFamily="18" charset="0"/>
-                              </a:rPr>
-                            </m:ctrlPr>
-                          </m:dPr>
-                          <m:e>
-                            <m:r>
-                              <a:rPr lang="en-US" sz="2400" b="0" i="0" baseline="0" dirty="0">
-                                <a:latin typeface="Cambria Math" panose="02040503050406030204" pitchFamily="18" charset="0"/>
-                              </a:rPr>
-                              <m:t>𝑖</m:t>
-                            </m:r>
-                          </m:e>
-                        </m:d>
-                      </m:sub>
-                    </m:sSub>
-                  </m:oMath>
-                </a14:m>
-                <a:r>
-                  <a:rPr sz="2400" b="0" i="0" baseline="0" dirty="0">
-                    <a:latin typeface="Calibri"/>
-                  </a:rPr>
-                  <a:t>; </a:t>
-                </a:r>
-                <a14:m>
-                  <m:oMath xmlns:m="http://schemas.openxmlformats.org/officeDocument/2006/math">
-                    <m:r>
-                      <a:rPr lang="en-US" sz="2400" b="0" i="0" baseline="0" dirty="0" smtClean="0">
-                        <a:latin typeface="Cambria Math" panose="02040503050406030204" pitchFamily="18" charset="0"/>
-                      </a:rPr>
-                      <m:t>𝜌</m:t>
-                    </m:r>
-                  </m:oMath>
-                </a14:m>
-                <a:r>
-                  <a:rPr sz="2400" b="0" i="0" baseline="0" dirty="0">
-                    <a:latin typeface="Calibri"/>
-                  </a:rPr>
-                  <a:t> still in ASSIGN only.</a:t>
-                </a:r>
-              </a:p>
-              <a:p>
-                <a:pPr>
-                  <a:lnSpc>
-                    <a:spcPct val="200000"/>
-                  </a:lnSpc>
-                  <a:buChar char="•"/>
-                </a:pPr>
-                <a:r>
-                  <a:rPr sz="2400" b="0" i="0" baseline="0" dirty="0">
-                    <a:latin typeface="Calibri"/>
-                  </a:rPr>
-                  <a:t>  Priority: sweep </a:t>
-                </a:r>
-                <a14:m>
-                  <m:oMath xmlns:m="http://schemas.openxmlformats.org/officeDocument/2006/math">
-                    <m:func>
-                      <m:funcPr>
-                        <m:ctrlPr>
-                          <a:rPr lang="en-US" sz="2400" b="0" i="0" baseline="0" dirty="0">
-                            <a:latin typeface="Cambria Math" panose="02040503050406030204" pitchFamily="18" charset="0"/>
-                          </a:rPr>
-                        </m:ctrlPr>
-                      </m:funcPr>
-                      <m:fName>
-                        <m:sSub>
-                          <m:sSubPr>
-                            <m:ctrlPr>
-                              <a:rPr lang="en-US" sz="2400" b="0" i="0" baseline="0" dirty="0">
-                                <a:latin typeface="Cambria Math" panose="02040503050406030204" pitchFamily="18" charset="0"/>
-                              </a:rPr>
-                            </m:ctrlPr>
-                          </m:sSubPr>
-                          <m:e>
-                            <m:r>
-                              <m:rPr>
-                                <m:sty m:val="p"/>
-                              </m:rPr>
-                              <a:rPr lang="en-US" sz="2400" b="0" i="0" baseline="0" dirty="0">
-                                <a:latin typeface="Cambria Math" panose="02040503050406030204" pitchFamily="18" charset="0"/>
-                              </a:rPr>
-                              <m:t>log</m:t>
-                            </m:r>
-                          </m:e>
-                          <m:sub>
-                            <m:r>
-                              <a:rPr lang="en-US" sz="2400" b="0" i="0" baseline="0" dirty="0">
-                                <a:latin typeface="Cambria Math" panose="02040503050406030204" pitchFamily="18" charset="0"/>
-                              </a:rPr>
-                              <m:t>10</m:t>
-                            </m:r>
-                          </m:sub>
-                        </m:sSub>
-                      </m:fName>
-                      <m:e>
-                        <m:r>
-                          <a:rPr lang="en-US" sz="2400" b="0" i="0" baseline="0" dirty="0">
-                            <a:latin typeface="Cambria Math" panose="02040503050406030204" pitchFamily="18" charset="0"/>
-                          </a:rPr>
-                          <m:t>𝑡</m:t>
-                        </m:r>
-                      </m:e>
-                    </m:func>
-                  </m:oMath>
-                </a14:m>
-                <a:r>
-                  <a:rPr sz="2400" b="0" i="0" baseline="0" dirty="0">
-                    <a:latin typeface="Calibri"/>
-                  </a:rPr>
-                  <a:t> — prove inverted-U survives </a:t>
-                </a:r>
-                <a:r>
-                  <a:rPr sz="2400" b="1" i="0" baseline="0" dirty="0">
-                    <a:latin typeface="Calibri"/>
-                  </a:rPr>
-                  <a:t>before</a:t>
-                </a:r>
-                <a:r>
-                  <a:rPr sz="2400" b="0" i="0" baseline="0" dirty="0">
-                    <a:latin typeface="Calibri"/>
-                  </a:rPr>
-                  <a:t> MLE.</a:t>
-                </a:r>
-              </a:p>
-              <a:p>
-                <a:pPr>
-                  <a:lnSpc>
-                    <a:spcPct val="200000"/>
-                  </a:lnSpc>
-                  <a:buChar char="•"/>
-                </a:pPr>
-                <a:r>
-                  <a:rPr sz="2400" b="0" i="0" baseline="0" dirty="0">
-                    <a:latin typeface="Calibri"/>
-                  </a:rPr>
-                  <a:t>  ASSIGN </a:t>
-                </a:r>
-                <a14:m>
-                  <m:oMath xmlns:m="http://schemas.openxmlformats.org/officeDocument/2006/math">
-                    <m:r>
-                      <a:rPr lang="en-US" sz="2400" b="0" i="0" baseline="0" dirty="0" smtClean="0">
-                        <a:latin typeface="Cambria Math" panose="02040503050406030204" pitchFamily="18" charset="0"/>
-                      </a:rPr>
-                      <m:t>→</m:t>
-                    </m:r>
-                  </m:oMath>
-                </a14:m>
-                <a:r>
-                  <a:rPr sz="2400" b="0" i="0" baseline="0" dirty="0">
-                    <a:latin typeface="Calibri"/>
-                  </a:rPr>
-                  <a:t> SCORE </a:t>
-                </a:r>
-                <a14:m>
-                  <m:oMath xmlns:m="http://schemas.openxmlformats.org/officeDocument/2006/math">
-                    <m:r>
-                      <a:rPr lang="en-US" sz="2400" b="0" i="0" baseline="0" dirty="0" smtClean="0">
-                        <a:latin typeface="Cambria Math" panose="02040503050406030204" pitchFamily="18" charset="0"/>
-                      </a:rPr>
-                      <m:t>→</m:t>
-                    </m:r>
-                  </m:oMath>
-                </a14:m>
-                <a:r>
-                  <a:rPr sz="2400" b="0" i="0" baseline="0" dirty="0">
-                    <a:latin typeface="Calibri"/>
-                  </a:rPr>
-                  <a:t> SELECT — score </a:t>
-                </a:r>
-                <a14:m>
-                  <m:oMath xmlns:m="http://schemas.openxmlformats.org/officeDocument/2006/math">
-                    <m:r>
-                      <a:rPr lang="en-US" sz="2400" b="0" i="0" baseline="0" dirty="0" smtClean="0">
-                        <a:latin typeface="Cambria Math" panose="02040503050406030204" pitchFamily="18" charset="0"/>
-                      </a:rPr>
-                      <m:t>≠</m:t>
-                    </m:r>
-                  </m:oMath>
-                </a14:m>
-                <a:r>
-                  <a:rPr sz="2400" b="0" i="0" baseline="0" dirty="0">
-                    <a:latin typeface="Calibri"/>
-                  </a:rPr>
-                  <a:t> select (binding).</a:t>
-                </a:r>
-              </a:p>
-            </p:txBody>
-          </p:sp>
-        </mc:Choice>
-        <mc:Fallback>
-          <p:sp>
-            <p:nvSpPr>
-              <p:cNvPr id="4" name="TextBox 3"/>
-              <p:cNvSpPr txBox="1">
-                <a:spLocks noRot="1" noChangeAspect="1" noMove="1" noResize="1" noEditPoints="1" noAdjustHandles="1" noChangeArrowheads="1" noChangeShapeType="1" noTextEdit="1"/>
-              </p:cNvSpPr>
-              <p:nvPr/>
-            </p:nvSpPr>
-            <p:spPr>
-              <a:xfrm>
-                <a:off x="384048" y="1033272"/>
-                <a:ext cx="11423599" cy="4540474"/>
-              </a:xfrm>
-              <a:prstGeom prst="rect">
-                <a:avLst/>
-              </a:prstGeom>
-              <a:blipFill>
-                <a:blip r:embed="rId4"/>
-                <a:stretch>
-                  <a:fillRect l="-889" b="-2235"/>
-                </a:stretch>
-              </a:blipFill>
-            </p:spPr>
-            <p:txBody>
-              <a:bodyPr/>
-              <a:lstStyle/>
-              <a:p>
-                <a:r>
-                  <a:rPr lang="en-US">
-                    <a:noFill/>
-                  </a:rPr>
-                  <a:t> </a:t>
-                </a:r>
-              </a:p>
-            </p:txBody>
-          </p:sp>
-        </mc:Fallback>
-      </mc:AlternateContent>
+      <p:grpSpPr/>
+      <p:sp>
+        <p:nvSpPr>
+          <p:cNvPr id="2" name="TextBox 1"/>
+          <p:cNvSpPr txBox="1"/>
+          <p:nvPr/>
+        </p:nvSpPr>
+        <p:spPr>
+          <a:xfrm>
+            <a:off x="384048" y="219456"/>
+            <a:ext cx="11423599" cy="457200"/>
+          </a:xfrm>
+          <a:prstGeom prst="rect">
+            <a:avLst/>
+          </a:prstGeom>
+          <a:noFill/>
+        </p:spPr>
+        <p:txBody>
+          <a:bodyPr wrap="none">
+            <a:spAutoFit/>
+          </a:bodyPr>
+          <a:lstStyle/>
+          <a:p>
+            <a:r>
+              <a:rPr sz="2000" b="1" i="0" baseline="0">
+                <a:latin typeface="Calibri"/>
+              </a:rPr>
+              <a:t>PD20 — Gibbs SELECT (temperature $t$)</a:t>
+            </a:r>
+          </a:p>
+        </p:txBody>
+      </p:sp>
+      <p:sp>
+        <p:nvSpPr>
+          <p:cNvPr id="3" name="TextBox 2"/>
+          <p:cNvSpPr txBox="1"/>
+          <p:nvPr/>
+        </p:nvSpPr>
+        <p:spPr>
+          <a:xfrm>
+            <a:off x="384048" y="713232"/>
+            <a:ext cx="11423599" cy="246888"/>
+          </a:xfrm>
+          <a:prstGeom prst="rect">
+            <a:avLst/>
+          </a:prstGeom>
+          <a:noFill/>
+        </p:spPr>
+        <p:txBody>
+          <a:bodyPr wrap="none">
+            <a:spAutoFit/>
+          </a:bodyPr>
+          <a:lstStyle/>
+          <a:p>
+            <a:r>
+              <a:rPr sz="1000" b="0" i="0" baseline="0">
+                <a:latin typeface="Calibri"/>
+              </a:rPr>
+              <a:t>MBB empirical caps · $\rho=0.5$ · inverted-U before MLE</a:t>
+            </a:r>
+          </a:p>
+        </p:txBody>
+      </p:sp>
+      <p:sp>
+        <p:nvSpPr>
+          <p:cNvPr id="4" name="TextBox 3"/>
+          <p:cNvSpPr txBox="1"/>
+          <p:nvPr/>
+        </p:nvSpPr>
+        <p:spPr>
+          <a:xfrm>
+            <a:off x="384048" y="1033272"/>
+            <a:ext cx="11423599" cy="4965192"/>
+          </a:xfrm>
+          <a:prstGeom prst="rect">
+            <a:avLst/>
+          </a:prstGeom>
+          <a:noFill/>
+        </p:spPr>
+        <p:txBody>
+          <a:bodyPr wrap="square">
+            <a:spAutoFit/>
+          </a:bodyPr>
+          <a:lstStyle/>
+          <a:p>
+            <a:pPr>
+              <a:buChar char="•"/>
+              <a:lnSpc>
+                <a:spcPct val="150000"/>
+              </a:lnSpc>
+              <a:spcBef>
+                <a:spcPts val="0"/>
+              </a:spcBef>
+              <a:spcAft>
+                <a:spcPts val="0"/>
+              </a:spcAft>
+            </a:pPr>
+            <a:r>
+              <a:rPr sz="1000" b="0" i="0" baseline="0">
+                <a:latin typeface="Calibri"/>
+              </a:rPr>
+              <a:t>  PD20: replace deterministic top-$K$ SELECT with Gibbs rule on $S_i$.</a:t>
+            </a:r>
+          </a:p>
+          <a:p>
+            <a:pPr>
+              <a:buChar char="•"/>
+              <a:lnSpc>
+                <a:spcPct val="150000"/>
+              </a:lnSpc>
+              <a:spcBef>
+                <a:spcPts val="0"/>
+              </a:spcBef>
+              <a:spcAft>
+                <a:spcPts val="0"/>
+              </a:spcAft>
+            </a:pPr>
+            <a:r>
+              <a:rPr sz="1000" b="0" i="0" baseline="0">
+                <a:latin typeface="Calibri"/>
+              </a:rPr>
+              <a:t>  Lock: $P_i \propto \exp(S_i/t)$ with $t$ in the denominator (stat-phys).</a:t>
+            </a:r>
+          </a:p>
+          <a:p>
+            <a:pPr>
+              <a:buChar char="•"/>
+              <a:lnSpc>
+                <a:spcPct val="150000"/>
+              </a:lnSpc>
+              <a:spcBef>
+                <a:spcPts val="0"/>
+              </a:spcBef>
+              <a:spcAft>
+                <a:spcPts val="0"/>
+              </a:spcAft>
+            </a:pPr>
+            <a:r>
+              <a:rPr sz="1000" b="0" i="0" baseline="0">
+                <a:latin typeface="Calibri"/>
+              </a:rPr>
+              <a:t>  Sim bridge: rule D = Gibbs weights + $K$ draws without replacement.</a:t>
+            </a:r>
+          </a:p>
+          <a:p>
+            <a:pPr>
+              <a:buChar char="•"/>
+              <a:lnSpc>
+                <a:spcPct val="150000"/>
+              </a:lnSpc>
+              <a:spcBef>
+                <a:spcPts val="0"/>
+              </a:spcBef>
+              <a:spcAft>
+                <a:spcPts val="0"/>
+              </a:spcAft>
+            </a:pPr>
+            <a:r>
+              <a:rPr sz="1000" b="0" i="0" baseline="0">
+                <a:latin typeface="Calibri"/>
+              </a:rPr>
+              <a:t>  SCORE unchanged: $S_i = \hat{A}_i - \lambda L_{C,g(i)}$; $\rho$ still in ASSIGN only.</a:t>
+            </a:r>
+          </a:p>
+          <a:p>
+            <a:pPr>
+              <a:buChar char="•"/>
+              <a:lnSpc>
+                <a:spcPct val="150000"/>
+              </a:lnSpc>
+              <a:spcBef>
+                <a:spcPts val="0"/>
+              </a:spcBef>
+              <a:spcAft>
+                <a:spcPts val="0"/>
+              </a:spcAft>
+            </a:pPr>
+            <a:r>
+              <a:rPr sz="1000" b="0" i="0" baseline="0">
+                <a:latin typeface="Calibri"/>
+              </a:rPr>
+              <a:t>  Priority: sweep $\log_{10} t$ — prove inverted-U survives **before** MLE.</a:t>
+            </a:r>
+          </a:p>
+          <a:p>
+            <a:pPr>
+              <a:buChar char="•"/>
+              <a:lnSpc>
+                <a:spcPct val="150000"/>
+              </a:lnSpc>
+              <a:spcBef>
+                <a:spcPts val="0"/>
+              </a:spcBef>
+              <a:spcAft>
+                <a:spcPts val="0"/>
+              </a:spcAft>
+            </a:pPr>
+            <a:r>
+              <a:rPr sz="1000" b="0" i="0" baseline="0">
+                <a:latin typeface="Calibri"/>
+              </a:rPr>
+              <a:t>  ASSIGN $\rightarrow$ SCORE $\rightarrow$ SELECT — score $\neq$ select (binding).</a:t>
+            </a:r>
+          </a:p>
+        </p:txBody>
+      </p:sp>
       <p:sp>
         <p:nvSpPr>
           <p:cNvPr id="5" name="TextBox 4"/>
@@ -3950,7 +3337,7 @@
 </file>
 
 <file path=ppt/slides/slide2.xml><?xml version="1.0" encoding="utf-8"?>
-<p:sld xmlns:a="http://schemas.openxmlformats.org/drawingml/2006/main" xmlns:r="http://schemas.openxmlformats.org/officeDocument/2006/relationships" xmlns:p="http://schemas.openxmlformats.org/presentationml/2006/main">
+<p:sld xmlns:a="http://schemas.openxmlformats.org/drawingml/2006/main" xmlns:p="http://schemas.openxmlformats.org/presentationml/2006/main" xmlns:r="http://schemas.openxmlformats.org/officeDocument/2006/relationships">
   <p:cSld>
     <p:spTree>
       <p:nvGrpSpPr>
@@ -3958,782 +3345,7 @@
         <p:cNvGrpSpPr/>
         <p:nvPr/>
       </p:nvGrpSpPr>
-      <p:grpSpPr>
-        <a:xfrm>
-          <a:off x="0" y="0"/>
-          <a:ext cx="0" cy="0"/>
-          <a:chOff x="0" y="0"/>
-          <a:chExt cx="0" cy="0"/>
-        </a:xfrm>
-      </p:grpSpPr>
-      <mc:AlternateContent xmlns:mc="http://schemas.openxmlformats.org/markup-compatibility/2006">
-        <mc:Choice xmlns:a14="http://schemas.microsoft.com/office/drawing/2010/main" Requires="a14">
-          <p:sp>
-            <p:nvSpPr>
-              <p:cNvPr id="2" name="TextBox 1"/>
-              <p:cNvSpPr txBox="1"/>
-              <p:nvPr/>
-            </p:nvSpPr>
-            <p:spPr>
-              <a:xfrm>
-                <a:off x="384048" y="219456"/>
-                <a:ext cx="5233484" cy="400110"/>
-              </a:xfrm>
-              <a:prstGeom prst="rect">
-                <a:avLst/>
-              </a:prstGeom>
-              <a:noFill/>
-            </p:spPr>
-            <p:txBody>
-              <a:bodyPr wrap="none">
-                <a:spAutoFit/>
-              </a:bodyPr>
-              <a:lstStyle/>
-              <a:p>
-                <a:r>
-                  <a:rPr sz="2000" b="1" i="0" baseline="0" dirty="0">
-                    <a:latin typeface="Calibri"/>
-                  </a:rPr>
-                  <a:t>Temperature sweep — rule D (Gibbs + </a:t>
-                </a:r>
-                <a14:m>
-                  <m:oMath xmlns:m="http://schemas.openxmlformats.org/officeDocument/2006/math">
-                    <m:r>
-                      <a:rPr lang="en-US" sz="2000" b="1" i="0" baseline="0" dirty="0" smtClean="0">
-                        <a:latin typeface="Cambria Math" panose="02040503050406030204" pitchFamily="18" charset="0"/>
-                      </a:rPr>
-                      <m:t>𝐾</m:t>
-                    </m:r>
-                  </m:oMath>
-                </a14:m>
-                <a:r>
-                  <a:rPr sz="2000" b="1" i="0" baseline="0" dirty="0">
-                    <a:latin typeface="Calibri"/>
-                  </a:rPr>
-                  <a:t> draws)</a:t>
-                </a:r>
-              </a:p>
-            </p:txBody>
-          </p:sp>
-        </mc:Choice>
-        <mc:Fallback>
-          <p:sp>
-            <p:nvSpPr>
-              <p:cNvPr id="2" name="TextBox 1"/>
-              <p:cNvSpPr txBox="1">
-                <a:spLocks noRot="1" noChangeAspect="1" noMove="1" noResize="1" noEditPoints="1" noAdjustHandles="1" noChangeArrowheads="1" noChangeShapeType="1" noTextEdit="1"/>
-              </p:cNvSpPr>
-              <p:nvPr/>
-            </p:nvSpPr>
-            <p:spPr>
-              <a:xfrm>
-                <a:off x="384048" y="219456"/>
-                <a:ext cx="5233484" cy="400110"/>
-              </a:xfrm>
-              <a:prstGeom prst="rect">
-                <a:avLst/>
-              </a:prstGeom>
-              <a:blipFill>
-                <a:blip r:embed="rId2"/>
-                <a:stretch>
-                  <a:fillRect l="-1211" t="-9375" r="-242" b="-28125"/>
-                </a:stretch>
-              </a:blipFill>
-            </p:spPr>
-            <p:txBody>
-              <a:bodyPr/>
-              <a:lstStyle/>
-              <a:p>
-                <a:r>
-                  <a:rPr lang="en-US">
-                    <a:noFill/>
-                  </a:rPr>
-                  <a:t> </a:t>
-                </a:r>
-              </a:p>
-            </p:txBody>
-          </p:sp>
-        </mc:Fallback>
-      </mc:AlternateContent>
-      <mc:AlternateContent xmlns:mc="http://schemas.openxmlformats.org/markup-compatibility/2006">
-        <mc:Choice xmlns:a14="http://schemas.microsoft.com/office/drawing/2010/main" Requires="a14">
-          <p:sp>
-            <p:nvSpPr>
-              <p:cNvPr id="3" name="TextBox 2"/>
-              <p:cNvSpPr txBox="1"/>
-              <p:nvPr/>
-            </p:nvSpPr>
-            <p:spPr>
-              <a:xfrm>
-                <a:off x="384048" y="713232"/>
-                <a:ext cx="3633239" cy="307777"/>
-              </a:xfrm>
-              <a:prstGeom prst="rect">
-                <a:avLst/>
-              </a:prstGeom>
-              <a:noFill/>
-            </p:spPr>
-            <p:txBody>
-              <a:bodyPr wrap="none">
-                <a:spAutoFit/>
-              </a:bodyPr>
-              <a:lstStyle/>
-              <a:p>
-                <a:r>
-                  <a:rPr sz="1400" b="0" i="0" baseline="0" dirty="0">
-                    <a:latin typeface="Calibri"/>
-                  </a:rPr>
-                  <a:t>MBB 2011-2021 · </a:t>
-                </a:r>
-                <a14:m>
-                  <m:oMath xmlns:m="http://schemas.openxmlformats.org/officeDocument/2006/math">
-                    <m:r>
-                      <a:rPr lang="en-US" sz="1400" b="0" i="0" baseline="0" dirty="0" smtClean="0">
-                        <a:latin typeface="Cambria Math" panose="02040503050406030204" pitchFamily="18" charset="0"/>
-                      </a:rPr>
-                      <m:t>𝜆</m:t>
-                    </m:r>
-                    <m:r>
-                      <a:rPr lang="en-US" sz="1400" b="0" i="0" baseline="0" dirty="0" smtClean="0">
-                        <a:latin typeface="Cambria Math" panose="02040503050406030204" pitchFamily="18" charset="0"/>
-                      </a:rPr>
-                      <m:t>∈</m:t>
-                    </m:r>
-                    <m:d>
-                      <m:dPr>
-                        <m:begChr m:val="{"/>
-                        <m:endChr m:val="}"/>
-                        <m:ctrlPr>
-                          <a:rPr lang="en-US" sz="1400" b="0" i="0" baseline="0" dirty="0">
-                            <a:latin typeface="Cambria Math" panose="02040503050406030204" pitchFamily="18" charset="0"/>
-                          </a:rPr>
-                        </m:ctrlPr>
-                      </m:dPr>
-                      <m:e>
-                        <m:r>
-                          <a:rPr lang="en-US" sz="1400" b="0" i="0" baseline="0" dirty="0">
-                            <a:latin typeface="Cambria Math" panose="02040503050406030204" pitchFamily="18" charset="0"/>
-                          </a:rPr>
-                          <m:t>1.5,2</m:t>
-                        </m:r>
-                      </m:e>
-                    </m:d>
-                  </m:oMath>
-                </a14:m>
-                <a:r>
-                  <a:rPr sz="1400" b="0" i="0" baseline="0" dirty="0">
-                    <a:latin typeface="Calibri"/>
-                  </a:rPr>
-                  <a:t> · </a:t>
-                </a:r>
-                <a14:m>
-                  <m:oMath xmlns:m="http://schemas.openxmlformats.org/officeDocument/2006/math">
-                    <m:func>
-                      <m:funcPr>
-                        <m:ctrlPr>
-                          <a:rPr lang="en-US" sz="1400" b="0" i="0" baseline="0" dirty="0">
-                            <a:latin typeface="Cambria Math" panose="02040503050406030204" pitchFamily="18" charset="0"/>
-                          </a:rPr>
-                        </m:ctrlPr>
-                      </m:funcPr>
-                      <m:fName>
-                        <m:sSub>
-                          <m:sSubPr>
-                            <m:ctrlPr>
-                              <a:rPr lang="en-US" sz="1400" b="0" i="0" baseline="0" dirty="0">
-                                <a:latin typeface="Cambria Math" panose="02040503050406030204" pitchFamily="18" charset="0"/>
-                              </a:rPr>
-                            </m:ctrlPr>
-                          </m:sSubPr>
-                          <m:e>
-                            <m:r>
-                              <m:rPr>
-                                <m:sty m:val="p"/>
-                              </m:rPr>
-                              <a:rPr lang="en-US" sz="1400" b="0" i="0" baseline="0" dirty="0">
-                                <a:latin typeface="Cambria Math" panose="02040503050406030204" pitchFamily="18" charset="0"/>
-                              </a:rPr>
-                              <m:t>log</m:t>
-                            </m:r>
-                          </m:e>
-                          <m:sub>
-                            <m:r>
-                              <a:rPr lang="en-US" sz="1400" b="0" i="0" baseline="0" dirty="0">
-                                <a:latin typeface="Cambria Math" panose="02040503050406030204" pitchFamily="18" charset="0"/>
-                              </a:rPr>
-                              <m:t>10</m:t>
-                            </m:r>
-                          </m:sub>
-                        </m:sSub>
-                      </m:fName>
-                      <m:e>
-                        <m:r>
-                          <a:rPr lang="en-US" sz="1400" b="0" i="0" baseline="0" dirty="0">
-                            <a:latin typeface="Cambria Math" panose="02040503050406030204" pitchFamily="18" charset="0"/>
-                          </a:rPr>
-                          <m:t>𝑡</m:t>
-                        </m:r>
-                      </m:e>
-                    </m:func>
-                    <m:r>
-                      <a:rPr lang="en-US" sz="1400" b="0" i="0" baseline="0" dirty="0">
-                        <a:latin typeface="Cambria Math" panose="02040503050406030204" pitchFamily="18" charset="0"/>
-                      </a:rPr>
-                      <m:t>∈</m:t>
-                    </m:r>
-                    <m:d>
-                      <m:dPr>
-                        <m:begChr m:val="["/>
-                        <m:endChr m:val="]"/>
-                        <m:ctrlPr>
-                          <a:rPr lang="en-US" sz="1400" b="0" i="0" baseline="0" dirty="0">
-                            <a:latin typeface="Cambria Math" panose="02040503050406030204" pitchFamily="18" charset="0"/>
-                          </a:rPr>
-                        </m:ctrlPr>
-                      </m:dPr>
-                      <m:e>
-                        <m:r>
-                          <a:rPr lang="en-US" sz="1400" b="0" i="0" baseline="0" dirty="0">
-                            <a:latin typeface="Cambria Math" panose="02040503050406030204" pitchFamily="18" charset="0"/>
-                          </a:rPr>
-                          <m:t>−3,3</m:t>
-                        </m:r>
-                      </m:e>
-                    </m:d>
-                  </m:oMath>
-                </a14:m>
-                <a:endParaRPr sz="1400" b="0" i="0" baseline="0" dirty="0">
-                  <a:latin typeface="Calibri"/>
-                </a:endParaRPr>
-              </a:p>
-            </p:txBody>
-          </p:sp>
-        </mc:Choice>
-        <mc:Fallback>
-          <p:sp>
-            <p:nvSpPr>
-              <p:cNvPr id="3" name="TextBox 2"/>
-              <p:cNvSpPr txBox="1">
-                <a:spLocks noRot="1" noChangeAspect="1" noMove="1" noResize="1" noEditPoints="1" noAdjustHandles="1" noChangeArrowheads="1" noChangeShapeType="1" noTextEdit="1"/>
-              </p:cNvSpPr>
-              <p:nvPr/>
-            </p:nvSpPr>
-            <p:spPr>
-              <a:xfrm>
-                <a:off x="384048" y="713232"/>
-                <a:ext cx="3633239" cy="307777"/>
-              </a:xfrm>
-              <a:prstGeom prst="rect">
-                <a:avLst/>
-              </a:prstGeom>
-              <a:blipFill>
-                <a:blip r:embed="rId3"/>
-                <a:stretch>
-                  <a:fillRect l="-697" t="-4000" b="-20000"/>
-                </a:stretch>
-              </a:blipFill>
-            </p:spPr>
-            <p:txBody>
-              <a:bodyPr/>
-              <a:lstStyle/>
-              <a:p>
-                <a:r>
-                  <a:rPr lang="en-US">
-                    <a:noFill/>
-                  </a:rPr>
-                  <a:t> </a:t>
-                </a:r>
-              </a:p>
-            </p:txBody>
-          </p:sp>
-        </mc:Fallback>
-      </mc:AlternateContent>
-      <p:pic>
-        <p:nvPicPr>
-          <p:cNvPr id="4" name="Picture 3" descr="GRANDCHILD_temperature_select_sweep_2011_2021.png"/>
-          <p:cNvPicPr>
-            <a:picLocks noChangeAspect="1"/>
-          </p:cNvPicPr>
-          <p:nvPr/>
-        </p:nvPicPr>
-        <p:blipFill>
-          <a:blip r:embed="rId4"/>
-          <a:stretch>
-            <a:fillRect/>
-          </a:stretch>
-        </p:blipFill>
-        <p:spPr>
-          <a:xfrm>
-            <a:off x="4457700" y="540541"/>
-            <a:ext cx="6671907" cy="5476211"/>
-          </a:xfrm>
-          <a:prstGeom prst="rect">
-            <a:avLst/>
-          </a:prstGeom>
-        </p:spPr>
-      </p:pic>
-      <mc:AlternateContent xmlns:mc="http://schemas.openxmlformats.org/markup-compatibility/2006">
-        <mc:Choice xmlns:a14="http://schemas.microsoft.com/office/drawing/2010/main" Requires="a14">
-          <p:sp>
-            <p:nvSpPr>
-              <p:cNvPr id="5" name="TextBox 4"/>
-              <p:cNvSpPr txBox="1"/>
-              <p:nvPr/>
-            </p:nvSpPr>
-            <p:spPr>
-              <a:xfrm>
-                <a:off x="384048" y="1639824"/>
-                <a:ext cx="3794760" cy="1684307"/>
-              </a:xfrm>
-              <a:prstGeom prst="rect">
-                <a:avLst/>
-              </a:prstGeom>
-              <a:noFill/>
-            </p:spPr>
-            <p:txBody>
-              <a:bodyPr wrap="square">
-                <a:spAutoFit/>
-              </a:bodyPr>
-              <a:lstStyle/>
-              <a:p>
-                <a:pPr>
-                  <a:lnSpc>
-                    <a:spcPct val="150000"/>
-                  </a:lnSpc>
-                  <a:buChar char="•"/>
-                </a:pPr>
-                <a:r>
-                  <a:rPr sz="1000" b="0" i="0" baseline="0" dirty="0">
-                    <a:latin typeface="Calibri"/>
-                  </a:rPr>
-                  <a:t>  SELECT: draft rate vs LOO (left) and pool mean (right) — Hero axes.</a:t>
-                </a:r>
-              </a:p>
-              <a:p>
-                <a:pPr>
-                  <a:lnSpc>
-                    <a:spcPct val="150000"/>
-                  </a:lnSpc>
-                  <a:buChar char="•"/>
-                </a:pPr>
-                <a:r>
-                  <a:rPr sz="1000" b="0" i="0" baseline="0" dirty="0">
-                    <a:latin typeface="Calibri"/>
-                  </a:rPr>
-                  <a:t>  MBB 2011-2021 · empirical caps · </a:t>
-                </a:r>
-                <a14:m>
-                  <m:oMath xmlns:m="http://schemas.openxmlformats.org/officeDocument/2006/math">
-                    <m:r>
-                      <a:rPr lang="en-US" sz="1000" b="0" i="0" baseline="0" dirty="0" smtClean="0">
-                        <a:latin typeface="Cambria Math" panose="02040503050406030204" pitchFamily="18" charset="0"/>
-                      </a:rPr>
-                      <m:t>𝜌</m:t>
-                    </m:r>
-                    <m:r>
-                      <a:rPr lang="en-US" sz="1000" b="0" i="0" baseline="0" dirty="0" smtClean="0">
-                        <a:latin typeface="Cambria Math" panose="02040503050406030204" pitchFamily="18" charset="0"/>
-                      </a:rPr>
-                      <m:t>=0.5</m:t>
-                    </m:r>
-                  </m:oMath>
-                </a14:m>
-                <a:r>
-                  <a:rPr sz="1000" b="0" i="0" baseline="0" dirty="0">
-                    <a:latin typeface="Calibri"/>
-                  </a:rPr>
-                  <a:t> · rule D · </a:t>
-                </a:r>
-                <a14:m>
-                  <m:oMath xmlns:m="http://schemas.openxmlformats.org/officeDocument/2006/math">
-                    <m:r>
-                      <a:rPr lang="en-US" sz="1000" b="0" i="0" baseline="0" dirty="0" smtClean="0">
-                        <a:latin typeface="Cambria Math" panose="02040503050406030204" pitchFamily="18" charset="0"/>
-                      </a:rPr>
-                      <m:t>𝜆</m:t>
-                    </m:r>
-                  </m:oMath>
-                </a14:m>
-                <a:r>
-                  <a:rPr sz="1000" b="0" i="0" baseline="0" dirty="0">
-                    <a:latin typeface="Calibri"/>
-                  </a:rPr>
-                  <a:t> panels 1.5, 2</a:t>
-                </a:r>
-              </a:p>
-              <a:p>
-                <a:pPr>
-                  <a:lnSpc>
-                    <a:spcPct val="150000"/>
-                  </a:lnSpc>
-                  <a:buChar char="•"/>
-                </a:pPr>
-                <a:r>
-                  <a:rPr sz="1000" b="0" i="0" baseline="0" dirty="0">
-                    <a:latin typeface="Calibri"/>
-                  </a:rPr>
-                  <a:t>  Empirical LOO: inverted u like.</a:t>
-                </a:r>
-              </a:p>
-              <a:p>
-                <a:pPr>
-                  <a:lnSpc>
-                    <a:spcPct val="150000"/>
-                  </a:lnSpc>
-                  <a:buChar char="•"/>
-                </a:pPr>
-                <a:r>
-                  <a:rPr sz="1000" b="0" i="0" baseline="0" dirty="0">
-                    <a:latin typeface="Calibri"/>
-                  </a:rPr>
-                  <a:t>  </a:t>
-                </a:r>
-                <a14:m>
-                  <m:oMath xmlns:m="http://schemas.openxmlformats.org/officeDocument/2006/math">
-                    <m:r>
-                      <a:rPr lang="en-US" sz="1000" b="0" i="0" baseline="0" dirty="0" smtClean="0">
-                        <a:latin typeface="Cambria Math" panose="02040503050406030204" pitchFamily="18" charset="0"/>
-                      </a:rPr>
-                      <m:t>𝜆</m:t>
-                    </m:r>
-                    <m:r>
-                      <a:rPr lang="en-US" sz="1000" b="0" i="0" baseline="0" dirty="0" smtClean="0">
-                        <a:latin typeface="Cambria Math" panose="02040503050406030204" pitchFamily="18" charset="0"/>
-                      </a:rPr>
-                      <m:t>=1.5</m:t>
-                    </m:r>
-                  </m:oMath>
-                </a14:m>
-                <a:r>
-                  <a:rPr sz="1000" b="0" i="0" baseline="0" dirty="0">
-                    <a:latin typeface="Calibri"/>
-                  </a:rPr>
-                  <a:t>: inverted-U-like on LOO for 9/13 </a:t>
-                </a:r>
-                <a14:m>
-                  <m:oMath xmlns:m="http://schemas.openxmlformats.org/officeDocument/2006/math">
-                    <m:r>
-                      <a:rPr lang="en-US" sz="1000" b="0" i="0" baseline="0" dirty="0" smtClean="0">
-                        <a:latin typeface="Cambria Math" panose="02040503050406030204" pitchFamily="18" charset="0"/>
-                      </a:rPr>
-                      <m:t>𝑡</m:t>
-                    </m:r>
-                  </m:oMath>
-                </a14:m>
-                <a:r>
-                  <a:rPr sz="1000" b="0" i="0" baseline="0" dirty="0">
-                    <a:latin typeface="Calibri"/>
-                  </a:rPr>
-                  <a:t> arms.</a:t>
-                </a:r>
-              </a:p>
-              <a:p>
-                <a:pPr>
-                  <a:lnSpc>
-                    <a:spcPct val="150000"/>
-                  </a:lnSpc>
-                  <a:buChar char="•"/>
-                </a:pPr>
-                <a:r>
-                  <a:rPr sz="1000" b="0" i="0" baseline="0" dirty="0">
-                    <a:latin typeface="Calibri"/>
-                  </a:rPr>
-                  <a:t>  </a:t>
-                </a:r>
-                <a14:m>
-                  <m:oMath xmlns:m="http://schemas.openxmlformats.org/officeDocument/2006/math">
-                    <m:r>
-                      <a:rPr lang="en-US" sz="1000" b="0" i="0" baseline="0" dirty="0" smtClean="0">
-                        <a:latin typeface="Cambria Math" panose="02040503050406030204" pitchFamily="18" charset="0"/>
-                      </a:rPr>
-                      <m:t>𝜆</m:t>
-                    </m:r>
-                    <m:r>
-                      <a:rPr lang="en-US" sz="1000" b="0" i="0" baseline="0" dirty="0" smtClean="0">
-                        <a:latin typeface="Cambria Math" panose="02040503050406030204" pitchFamily="18" charset="0"/>
-                      </a:rPr>
-                      <m:t>=2</m:t>
-                    </m:r>
-                  </m:oMath>
-                </a14:m>
-                <a:r>
-                  <a:rPr sz="1000" b="0" i="0" baseline="0" dirty="0">
-                    <a:latin typeface="Calibri"/>
-                  </a:rPr>
-                  <a:t>: inverted-U-like on LOO for 10/13 $t$ arms.</a:t>
-                </a:r>
-              </a:p>
-              <a:p>
-                <a:pPr>
-                  <a:lnSpc>
-                    <a:spcPct val="150000"/>
-                  </a:lnSpc>
-                  <a:buChar char="•"/>
-                </a:pPr>
-                <a:r>
-                  <a:rPr sz="1000" b="0" i="0" baseline="0" dirty="0">
-                    <a:latin typeface="Calibri"/>
-                  </a:rPr>
-                  <a:t>  Cold </a:t>
-                </a:r>
-                <a14:m>
-                  <m:oMath xmlns:m="http://schemas.openxmlformats.org/officeDocument/2006/math">
-                    <m:r>
-                      <a:rPr lang="en-US" sz="1000" b="0" i="0" baseline="0" dirty="0" smtClean="0">
-                        <a:latin typeface="Cambria Math" panose="02040503050406030204" pitchFamily="18" charset="0"/>
-                      </a:rPr>
-                      <m:t>𝑡</m:t>
-                    </m:r>
-                  </m:oMath>
-                </a14:m>
-                <a:r>
-                  <a:rPr sz="1000" b="0" i="0" baseline="0" dirty="0">
-                    <a:latin typeface="Calibri"/>
-                  </a:rPr>
-                  <a:t>: near hard cut; hot </a:t>
-                </a:r>
-                <a14:m>
-                  <m:oMath xmlns:m="http://schemas.openxmlformats.org/officeDocument/2006/math">
-                    <m:r>
-                      <a:rPr lang="en-US" sz="1000" b="0" i="0" baseline="0" dirty="0" smtClean="0">
-                        <a:latin typeface="Cambria Math" panose="02040503050406030204" pitchFamily="18" charset="0"/>
-                      </a:rPr>
-                      <m:t>𝑡</m:t>
-                    </m:r>
-                  </m:oMath>
-                </a14:m>
-                <a:r>
-                  <a:rPr sz="1000" b="0" i="0" baseline="0" dirty="0">
-                    <a:latin typeface="Calibri"/>
-                  </a:rPr>
-                  <a:t>: flattens toward uniform </a:t>
-                </a:r>
-                <a14:m>
-                  <m:oMath xmlns:m="http://schemas.openxmlformats.org/officeDocument/2006/math">
-                    <m:r>
-                      <a:rPr lang="en-US" sz="1000" b="0" i="0" baseline="0" dirty="0" smtClean="0">
-                        <a:latin typeface="Cambria Math" panose="02040503050406030204" pitchFamily="18" charset="0"/>
-                      </a:rPr>
-                      <m:t>𝐾</m:t>
-                    </m:r>
-                  </m:oMath>
-                </a14:m>
-                <a:r>
-                  <a:rPr sz="1000" b="0" i="0" baseline="0" dirty="0">
-                    <a:latin typeface="Calibri"/>
-                  </a:rPr>
-                  <a:t>-draws.</a:t>
-                </a:r>
-              </a:p>
-              <a:p>
-                <a:pPr>
-                  <a:lnSpc>
-                    <a:spcPct val="150000"/>
-                  </a:lnSpc>
-                  <a:buChar char="•"/>
-                </a:pPr>
-                <a:r>
-                  <a:rPr sz="1000" b="0" i="0" baseline="0" dirty="0">
-                    <a:latin typeface="Calibri"/>
-                  </a:rPr>
-                  <a:t>  Pool mean often stays monotone — same PD17 readout limitation.</a:t>
-                </a:r>
-              </a:p>
-            </p:txBody>
-          </p:sp>
-        </mc:Choice>
-        <mc:Fallback>
-          <p:sp>
-            <p:nvSpPr>
-              <p:cNvPr id="5" name="TextBox 4"/>
-              <p:cNvSpPr txBox="1">
-                <a:spLocks noRot="1" noChangeAspect="1" noMove="1" noResize="1" noEditPoints="1" noAdjustHandles="1" noChangeArrowheads="1" noChangeShapeType="1" noTextEdit="1"/>
-              </p:cNvSpPr>
-              <p:nvPr/>
-            </p:nvSpPr>
-            <p:spPr>
-              <a:xfrm>
-                <a:off x="384048" y="1639824"/>
-                <a:ext cx="3794760" cy="1684307"/>
-              </a:xfrm>
-              <a:prstGeom prst="rect">
-                <a:avLst/>
-              </a:prstGeom>
-              <a:blipFill>
-                <a:blip r:embed="rId5"/>
-                <a:stretch>
-                  <a:fillRect b="-1504"/>
-                </a:stretch>
-              </a:blipFill>
-            </p:spPr>
-            <p:txBody>
-              <a:bodyPr/>
-              <a:lstStyle/>
-              <a:p>
-                <a:r>
-                  <a:rPr lang="en-US">
-                    <a:noFill/>
-                  </a:rPr>
-                  <a:t> </a:t>
-                </a:r>
-              </a:p>
-            </p:txBody>
-          </p:sp>
-        </mc:Fallback>
-      </mc:AlternateContent>
-      <mc:AlternateContent xmlns:mc="http://schemas.openxmlformats.org/markup-compatibility/2006">
-        <mc:Choice xmlns:a14="http://schemas.microsoft.com/office/drawing/2010/main" Requires="a14">
-          <p:sp>
-            <p:nvSpPr>
-              <p:cNvPr id="6" name="TextBox 5"/>
-              <p:cNvSpPr txBox="1"/>
-              <p:nvPr/>
-            </p:nvSpPr>
-            <p:spPr>
-              <a:xfrm>
-                <a:off x="384048" y="6053328"/>
-                <a:ext cx="6127640" cy="261610"/>
-              </a:xfrm>
-              <a:prstGeom prst="rect">
-                <a:avLst/>
-              </a:prstGeom>
-              <a:noFill/>
-            </p:spPr>
-            <p:txBody>
-              <a:bodyPr wrap="none">
-                <a:spAutoFit/>
-              </a:bodyPr>
-              <a:lstStyle/>
-              <a:p>
-                <a:pPr algn="l"/>
-                <a:r>
-                  <a:rPr sz="1100" b="1" i="0" baseline="0" dirty="0">
-                    <a:latin typeface="Calibri"/>
-                  </a:rPr>
-                  <a:t>Talking point: check LOO panels at </a:t>
-                </a:r>
-                <a14:m>
-                  <m:oMath xmlns:m="http://schemas.openxmlformats.org/officeDocument/2006/math">
-                    <m:r>
-                      <a:rPr lang="en-US" sz="1100" b="1" i="0" baseline="0" dirty="0" smtClean="0">
-                        <a:latin typeface="Cambria Math" panose="02040503050406030204" pitchFamily="18" charset="0"/>
-                      </a:rPr>
-                      <m:t>𝜆</m:t>
-                    </m:r>
-                    <m:r>
-                      <a:rPr lang="en-US" sz="1100" b="1" i="0" baseline="0" dirty="0" smtClean="0">
-                        <a:latin typeface="Cambria Math" panose="02040503050406030204" pitchFamily="18" charset="0"/>
-                      </a:rPr>
-                      <m:t>=1.5</m:t>
-                    </m:r>
-                  </m:oMath>
-                </a14:m>
-                <a:r>
-                  <a:rPr sz="1100" b="1" i="0" baseline="0" dirty="0">
-                    <a:latin typeface="Calibri"/>
-                  </a:rPr>
-                  <a:t>–</a:t>
-                </a:r>
-                <a14:m>
-                  <m:oMath xmlns:m="http://schemas.openxmlformats.org/officeDocument/2006/math">
-                    <m:r>
-                      <a:rPr lang="en-US" sz="1100" b="1" i="0" baseline="0" dirty="0" smtClean="0">
-                        <a:latin typeface="Cambria Math" panose="02040503050406030204" pitchFamily="18" charset="0"/>
-                      </a:rPr>
-                      <m:t>2</m:t>
-                    </m:r>
-                  </m:oMath>
-                </a14:m>
-                <a:r>
-                  <a:rPr sz="1100" b="1" i="0" baseline="0" dirty="0">
-                    <a:latin typeface="Calibri"/>
-                  </a:rPr>
-                  <a:t> — does a </a:t>
-                </a:r>
-                <a14:m>
-                  <m:oMath xmlns:m="http://schemas.openxmlformats.org/officeDocument/2006/math">
-                    <m:r>
-                      <a:rPr lang="en-US" sz="1100" b="1" i="0" baseline="0" dirty="0" smtClean="0">
-                        <a:latin typeface="Cambria Math" panose="02040503050406030204" pitchFamily="18" charset="0"/>
-                      </a:rPr>
-                      <m:t>𝑡</m:t>
-                    </m:r>
-                  </m:oMath>
-                </a14:m>
-                <a:r>
-                  <a:rPr sz="1100" b="1" i="0" baseline="0" dirty="0">
-                    <a:latin typeface="Calibri"/>
-                  </a:rPr>
-                  <a:t> window preserve inverted-U vs empirical?</a:t>
-                </a:r>
-              </a:p>
-            </p:txBody>
-          </p:sp>
-        </mc:Choice>
-        <mc:Fallback>
-          <p:sp>
-            <p:nvSpPr>
-              <p:cNvPr id="6" name="TextBox 5"/>
-              <p:cNvSpPr txBox="1">
-                <a:spLocks noRot="1" noChangeAspect="1" noMove="1" noResize="1" noEditPoints="1" noAdjustHandles="1" noChangeArrowheads="1" noChangeShapeType="1" noTextEdit="1"/>
-              </p:cNvSpPr>
-              <p:nvPr/>
-            </p:nvSpPr>
-            <p:spPr>
-              <a:xfrm>
-                <a:off x="384048" y="6053328"/>
-                <a:ext cx="6127640" cy="261610"/>
-              </a:xfrm>
-              <a:prstGeom prst="rect">
-                <a:avLst/>
-              </a:prstGeom>
-              <a:blipFill>
-                <a:blip r:embed="rId6"/>
-                <a:stretch>
-                  <a:fillRect b="-13636"/>
-                </a:stretch>
-              </a:blipFill>
-            </p:spPr>
-            <p:txBody>
-              <a:bodyPr/>
-              <a:lstStyle/>
-              <a:p>
-                <a:r>
-                  <a:rPr lang="en-US">
-                    <a:noFill/>
-                  </a:rPr>
-                  <a:t> </a:t>
-                </a:r>
-              </a:p>
-            </p:txBody>
-          </p:sp>
-        </mc:Fallback>
-      </mc:AlternateContent>
-    </p:spTree>
-  </p:cSld>
-  <p:clrMapOvr>
-    <a:masterClrMapping/>
-  </p:clrMapOvr>
-</p:sld>
-</file>
-
-<file path=ppt/slides/slide3.xml><?xml version="1.0" encoding="utf-8"?>
-<p:sld xmlns:a="http://schemas.openxmlformats.org/drawingml/2006/main" xmlns:r="http://schemas.openxmlformats.org/officeDocument/2006/relationships" xmlns:p="http://schemas.openxmlformats.org/presentationml/2006/main">
-  <p:cSld>
-    <p:spTree>
-      <p:nvGrpSpPr>
-        <p:cNvPr id="1" name=""/>
-        <p:cNvGrpSpPr/>
-        <p:nvPr/>
-      </p:nvGrpSpPr>
-      <p:grpSpPr>
-        <a:xfrm>
-          <a:off x="0" y="0"/>
-          <a:ext cx="0" cy="0"/>
-          <a:chOff x="0" y="0"/>
-          <a:chExt cx="0" cy="0"/>
-        </a:xfrm>
-      </p:grpSpPr>
+      <p:grpSpPr/>
       <p:sp>
         <p:nvSpPr>
           <p:cNvPr id="2" name="TextBox 1"/>
@@ -4760,597 +3372,261 @@
               <a:rPr sz="2000" b="1" i="0" baseline="0">
                 <a:latin typeface="Calibri"/>
               </a:rPr>
-              <a:t>Cold limit — rule C vs rule D</a:t>
-            </a:r>
-          </a:p>
-        </p:txBody>
-      </p:sp>
-      <mc:AlternateContent xmlns:mc="http://schemas.openxmlformats.org/markup-compatibility/2006">
-        <mc:Choice xmlns:a14="http://schemas.microsoft.com/office/drawing/2010/main" Requires="a14">
-          <p:sp>
-            <p:nvSpPr>
-              <p:cNvPr id="3" name="TextBox 2"/>
-              <p:cNvSpPr txBox="1"/>
-              <p:nvPr/>
-            </p:nvSpPr>
-            <p:spPr>
-              <a:xfrm>
-                <a:off x="384048" y="713232"/>
-                <a:ext cx="2453107" cy="307777"/>
-              </a:xfrm>
-              <a:prstGeom prst="rect">
-                <a:avLst/>
-              </a:prstGeom>
-              <a:noFill/>
-            </p:spPr>
-            <p:txBody>
-              <a:bodyPr wrap="none">
-                <a:spAutoFit/>
-              </a:bodyPr>
-              <a:lstStyle/>
-              <a:p>
-                <a14:m>
-                  <m:oMath xmlns:m="http://schemas.openxmlformats.org/officeDocument/2006/math">
-                    <m:r>
-                      <a:rPr lang="en-US" sz="1400" b="0" i="0" baseline="0" dirty="0" smtClean="0">
-                        <a:latin typeface="Cambria Math" panose="02040503050406030204" pitchFamily="18" charset="0"/>
-                      </a:rPr>
-                      <m:t>𝜆</m:t>
-                    </m:r>
-                    <m:r>
-                      <a:rPr lang="en-US" sz="1400" b="0" i="0" baseline="0" dirty="0" smtClean="0">
-                        <a:latin typeface="Cambria Math" panose="02040503050406030204" pitchFamily="18" charset="0"/>
-                      </a:rPr>
-                      <m:t>=2</m:t>
-                    </m:r>
-                  </m:oMath>
-                </a14:m>
-                <a:r>
-                  <a:rPr sz="1400" b="0" i="0" baseline="0" dirty="0">
-                    <a:latin typeface="Calibri"/>
-                  </a:rPr>
-                  <a:t> · </a:t>
-                </a:r>
-                <a14:m>
-                  <m:oMath xmlns:m="http://schemas.openxmlformats.org/officeDocument/2006/math">
-                    <m:r>
-                      <a:rPr lang="en-US" sz="1400" b="0" i="0" baseline="0" dirty="0" smtClean="0">
-                        <a:latin typeface="Cambria Math" panose="02040503050406030204" pitchFamily="18" charset="0"/>
-                      </a:rPr>
-                      <m:t>𝑡</m:t>
-                    </m:r>
-                    <m:r>
-                      <a:rPr lang="en-US" sz="1400" b="0" i="0" baseline="0" dirty="0" smtClean="0">
-                        <a:latin typeface="Cambria Math" panose="02040503050406030204" pitchFamily="18" charset="0"/>
-                      </a:rPr>
-                      <m:t>=0.001</m:t>
-                    </m:r>
-                  </m:oMath>
-                </a14:m>
-                <a:r>
-                  <a:rPr sz="1400" b="0" i="0" baseline="0" dirty="0">
-                    <a:latin typeface="Calibri"/>
-                  </a:rPr>
-                  <a:t> · same seeds</a:t>
-                </a:r>
-              </a:p>
-            </p:txBody>
-          </p:sp>
-        </mc:Choice>
-        <mc:Fallback>
-          <p:sp>
-            <p:nvSpPr>
-              <p:cNvPr id="3" name="TextBox 2"/>
-              <p:cNvSpPr txBox="1">
-                <a:spLocks noRot="1" noChangeAspect="1" noMove="1" noResize="1" noEditPoints="1" noAdjustHandles="1" noChangeArrowheads="1" noChangeShapeType="1" noTextEdit="1"/>
-              </p:cNvSpPr>
-              <p:nvPr/>
-            </p:nvSpPr>
-            <p:spPr>
-              <a:xfrm>
-                <a:off x="384048" y="713232"/>
-                <a:ext cx="2453107" cy="307777"/>
-              </a:xfrm>
-              <a:prstGeom prst="rect">
-                <a:avLst/>
-              </a:prstGeom>
-              <a:blipFill>
-                <a:blip r:embed="rId2"/>
-                <a:stretch>
-                  <a:fillRect t="-4000" b="-20000"/>
-                </a:stretch>
-              </a:blipFill>
-            </p:spPr>
-            <p:txBody>
-              <a:bodyPr/>
-              <a:lstStyle/>
-              <a:p>
-                <a:r>
-                  <a:rPr lang="en-US">
-                    <a:noFill/>
-                  </a:rPr>
-                  <a:t> </a:t>
-                </a:r>
-              </a:p>
-            </p:txBody>
-          </p:sp>
-        </mc:Fallback>
-      </mc:AlternateContent>
+              <a:t>Temperature sweep — rule D (Gibbs + $K$ draws)</a:t>
+            </a:r>
+          </a:p>
+        </p:txBody>
+      </p:sp>
+      <p:sp>
+        <p:nvSpPr>
+          <p:cNvPr id="3" name="TextBox 2"/>
+          <p:cNvSpPr txBox="1"/>
+          <p:nvPr/>
+        </p:nvSpPr>
+        <p:spPr>
+          <a:xfrm>
+            <a:off x="384048" y="713232"/>
+            <a:ext cx="11423599" cy="246888"/>
+          </a:xfrm>
+          <a:prstGeom prst="rect">
+            <a:avLst/>
+          </a:prstGeom>
+          <a:noFill/>
+        </p:spPr>
+        <p:txBody>
+          <a:bodyPr wrap="none">
+            <a:spAutoFit/>
+          </a:bodyPr>
+          <a:lstStyle/>
+          <a:p>
+            <a:r>
+              <a:rPr sz="1000" b="0" i="0" baseline="0">
+                <a:latin typeface="Calibri"/>
+              </a:rPr>
+              <a:t>MBB 2011-2021 · $\lambda \in \{1.5, 2\}$ · $\log_{10} t \in [-3,3]$</a:t>
+            </a:r>
+          </a:p>
+        </p:txBody>
+      </p:sp>
       <p:pic>
         <p:nvPicPr>
-          <p:cNvPr id="4" name="Picture 3" descr="GRANDCHILD_temperature_cold_limit_2011_2021.png"/>
+          <p:cNvPr id="4" name="Picture 3" descr="GRANDCHILD_temperature_select_sweep_2011_2021.png"/>
           <p:cNvPicPr>
             <a:picLocks noChangeAspect="1"/>
           </p:cNvPicPr>
           <p:nvPr/>
         </p:nvPicPr>
         <p:blipFill>
-          <a:blip r:embed="rId3"/>
+          <a:blip r:embed="rId2"/>
           <a:stretch>
             <a:fillRect/>
           </a:stretch>
         </p:blipFill>
         <p:spPr>
           <a:xfrm>
-            <a:off x="1440247" y="993753"/>
-            <a:ext cx="9311507" cy="3874131"/>
+            <a:off x="5058016" y="1033272"/>
+            <a:ext cx="6071591" cy="4983480"/>
           </a:xfrm>
           <a:prstGeom prst="rect">
             <a:avLst/>
           </a:prstGeom>
         </p:spPr>
       </p:pic>
-      <mc:AlternateContent xmlns:mc="http://schemas.openxmlformats.org/markup-compatibility/2006">
-        <mc:Choice xmlns:a14="http://schemas.microsoft.com/office/drawing/2010/main" Requires="a14">
-          <p:sp>
-            <p:nvSpPr>
-              <p:cNvPr id="5" name="TextBox 4"/>
-              <p:cNvSpPr txBox="1"/>
-              <p:nvPr/>
-            </p:nvSpPr>
-            <p:spPr>
-              <a:xfrm>
-                <a:off x="1144699" y="5160305"/>
-                <a:ext cx="11663172" cy="802901"/>
-              </a:xfrm>
-              <a:prstGeom prst="rect">
-                <a:avLst/>
-              </a:prstGeom>
-              <a:noFill/>
-            </p:spPr>
-            <p:txBody>
-              <a:bodyPr wrap="square" numCol="2">
-                <a:noAutofit/>
-              </a:bodyPr>
-              <a:lstStyle/>
-              <a:p>
-                <a:pPr>
-                  <a:lnSpc>
-                    <a:spcPct val="150000"/>
-                  </a:lnSpc>
-                  <a:buChar char="•"/>
-                </a:pPr>
-                <a:r>
-                  <a:rPr sz="1000" b="0" i="0" baseline="0" dirty="0">
-                    <a:latin typeface="Calibri"/>
-                  </a:rPr>
-                  <a:t>  Same ASSIGN seeds; only SELECT rule differs (C = top-</a:t>
-                </a:r>
-                <a14:m>
-                  <m:oMath xmlns:m="http://schemas.openxmlformats.org/officeDocument/2006/math">
-                    <m:r>
-                      <a:rPr lang="en-US" sz="1000" b="0" i="0" baseline="0" dirty="0" smtClean="0">
-                        <a:latin typeface="Cambria Math" panose="02040503050406030204" pitchFamily="18" charset="0"/>
-                      </a:rPr>
-                      <m:t>𝐾</m:t>
-                    </m:r>
-                  </m:oMath>
-                </a14:m>
-                <a:r>
-                  <a:rPr sz="1000" b="0" i="0" baseline="0" dirty="0">
-                    <a:latin typeface="Calibri"/>
-                  </a:rPr>
-                  <a:t>, D = cold Gibbs).</a:t>
-                </a:r>
-              </a:p>
-              <a:p>
-                <a:pPr>
-                  <a:lnSpc>
-                    <a:spcPct val="150000"/>
-                  </a:lnSpc>
-                  <a:buChar char="•"/>
-                </a:pPr>
-                <a:r>
-                  <a:rPr sz="1000" b="0" i="0" baseline="0" dirty="0">
-                    <a:latin typeface="Calibri"/>
-                  </a:rPr>
-                  <a:t>  Fixed </a:t>
-                </a:r>
-                <a14:m>
-                  <m:oMath xmlns:m="http://schemas.openxmlformats.org/officeDocument/2006/math">
-                    <m:r>
-                      <a:rPr lang="en-US" sz="1000" b="0" i="0" baseline="0" dirty="0" smtClean="0">
-                        <a:latin typeface="Cambria Math" panose="02040503050406030204" pitchFamily="18" charset="0"/>
-                      </a:rPr>
-                      <m:t>𝜆</m:t>
-                    </m:r>
-                    <m:r>
-                      <a:rPr lang="en-US" sz="1000" b="0" i="0" baseline="0" dirty="0" smtClean="0">
-                        <a:latin typeface="Cambria Math" panose="02040503050406030204" pitchFamily="18" charset="0"/>
-                      </a:rPr>
-                      <m:t>=2</m:t>
-                    </m:r>
-                  </m:oMath>
-                </a14:m>
-                <a:r>
-                  <a:rPr sz="1000" b="0" i="0" baseline="0" dirty="0">
-                    <a:latin typeface="Calibri"/>
-                  </a:rPr>
-                  <a:t>, </a:t>
-                </a:r>
-                <a14:m>
-                  <m:oMath xmlns:m="http://schemas.openxmlformats.org/officeDocument/2006/math">
-                    <m:r>
-                      <a:rPr lang="en-US" sz="1000" b="0" i="0" baseline="0" dirty="0" smtClean="0">
-                        <a:latin typeface="Cambria Math" panose="02040503050406030204" pitchFamily="18" charset="0"/>
-                      </a:rPr>
-                      <m:t>𝑡</m:t>
-                    </m:r>
-                    <m:r>
-                      <a:rPr lang="en-US" sz="1000" b="0" i="0" baseline="0" dirty="0" smtClean="0">
-                        <a:latin typeface="Cambria Math" panose="02040503050406030204" pitchFamily="18" charset="0"/>
-                      </a:rPr>
-                      <m:t>=0.001</m:t>
-                    </m:r>
-                  </m:oMath>
-                </a14:m>
-                <a:r>
-                  <a:rPr sz="1000" b="0" i="0" baseline="0" dirty="0">
-                    <a:latin typeface="Calibri"/>
-                  </a:rPr>
-                  <a:t> (</a:t>
-                </a:r>
-                <a14:m>
-                  <m:oMath xmlns:m="http://schemas.openxmlformats.org/officeDocument/2006/math">
-                    <m:func>
-                      <m:funcPr>
-                        <m:ctrlPr>
-                          <a:rPr lang="en-US" sz="1000" b="0" i="0" baseline="0" dirty="0">
-                            <a:latin typeface="Cambria Math" panose="02040503050406030204" pitchFamily="18" charset="0"/>
-                          </a:rPr>
-                        </m:ctrlPr>
-                      </m:funcPr>
-                      <m:fName>
-                        <m:sSub>
-                          <m:sSubPr>
-                            <m:ctrlPr>
-                              <a:rPr lang="en-US" sz="1000" b="0" i="0" baseline="0" dirty="0">
-                                <a:latin typeface="Cambria Math" panose="02040503050406030204" pitchFamily="18" charset="0"/>
-                              </a:rPr>
-                            </m:ctrlPr>
-                          </m:sSubPr>
-                          <m:e>
-                            <m:r>
-                              <m:rPr>
-                                <m:sty m:val="p"/>
-                              </m:rPr>
-                              <a:rPr lang="en-US" sz="1000" b="0" i="0" baseline="0" dirty="0">
-                                <a:latin typeface="Cambria Math" panose="02040503050406030204" pitchFamily="18" charset="0"/>
-                              </a:rPr>
-                              <m:t>log</m:t>
-                            </m:r>
-                          </m:e>
-                          <m:sub>
-                            <m:r>
-                              <a:rPr lang="en-US" sz="1000" b="0" i="0" baseline="0" dirty="0">
-                                <a:latin typeface="Cambria Math" panose="02040503050406030204" pitchFamily="18" charset="0"/>
-                              </a:rPr>
-                              <m:t>10</m:t>
-                            </m:r>
-                          </m:sub>
-                        </m:sSub>
-                      </m:fName>
-                      <m:e>
-                        <m:r>
-                          <a:rPr lang="en-US" sz="1000" b="0" i="0" baseline="0" dirty="0">
-                            <a:latin typeface="Cambria Math" panose="02040503050406030204" pitchFamily="18" charset="0"/>
-                          </a:rPr>
-                          <m:t>𝑡</m:t>
-                        </m:r>
-                      </m:e>
-                    </m:func>
-                    <m:r>
-                      <a:rPr lang="en-US" sz="1000" b="0" i="0" baseline="0" dirty="0">
-                        <a:latin typeface="Cambria Math" panose="02040503050406030204" pitchFamily="18" charset="0"/>
-                      </a:rPr>
-                      <m:t>=−3</m:t>
-                    </m:r>
-                  </m:oMath>
-                </a14:m>
-                <a:r>
-                  <a:rPr sz="1000" b="0" i="0" baseline="0" dirty="0">
-                    <a:latin typeface="Calibri"/>
-                  </a:rPr>
-                  <a:t>).</a:t>
-                </a:r>
-              </a:p>
-              <a:p>
-                <a:pPr>
-                  <a:lnSpc>
-                    <a:spcPct val="150000"/>
-                  </a:lnSpc>
-                  <a:buChar char="•"/>
-                </a:pPr>
-                <a:r>
-                  <a:rPr sz="1000" b="0" i="0" baseline="0" dirty="0">
-                    <a:latin typeface="Calibri"/>
-                  </a:rPr>
-                  <a:t>  Max bin gap C vs D: LOO = 0.00e+00, pool mean = 0.00e+00.</a:t>
-                </a:r>
-              </a:p>
-              <a:p>
-                <a:pPr>
-                  <a:lnSpc>
-                    <a:spcPct val="150000"/>
-                  </a:lnSpc>
-                  <a:buChar char="•"/>
-                </a:pPr>
-                <a:r>
-                  <a:rPr sz="1000" b="0" i="0" baseline="0" dirty="0">
-                    <a:latin typeface="Calibri"/>
-                  </a:rPr>
-                  <a:t>  LOO curvature: C = inverted u like; D = inverted u like.</a:t>
-                </a:r>
-              </a:p>
-              <a:p>
-                <a:pPr>
-                  <a:lnSpc>
-                    <a:spcPct val="150000"/>
-                  </a:lnSpc>
-                  <a:buChar char="•"/>
-                </a:pPr>
-                <a:r>
-                  <a:rPr sz="1000" b="0" i="0" baseline="0" dirty="0">
-                    <a:latin typeface="Calibri"/>
-                  </a:rPr>
-                  <a:t>  Expect overlay coincidence at cold </a:t>
-                </a:r>
-                <a14:m>
-                  <m:oMath xmlns:m="http://schemas.openxmlformats.org/officeDocument/2006/math">
-                    <m:r>
-                      <a:rPr lang="en-US" sz="1000" b="0" i="0" baseline="0" dirty="0" smtClean="0">
-                        <a:latin typeface="Cambria Math" panose="02040503050406030204" pitchFamily="18" charset="0"/>
-                      </a:rPr>
-                      <m:t>𝑡</m:t>
-                    </m:r>
-                  </m:oMath>
-                </a14:m>
-                <a:r>
-                  <a:rPr sz="1000" b="0" i="0" baseline="0" dirty="0">
-                    <a:latin typeface="Calibri"/>
-                  </a:rPr>
-                  <a:t> (Gibbs </a:t>
-                </a:r>
-                <a14:m>
-                  <m:oMath xmlns:m="http://schemas.openxmlformats.org/officeDocument/2006/math">
-                    <m:r>
-                      <a:rPr lang="en-US" sz="1000" b="0" i="0" baseline="0" dirty="0" smtClean="0">
-                        <a:latin typeface="Cambria Math" panose="02040503050406030204" pitchFamily="18" charset="0"/>
-                      </a:rPr>
-                      <m:t>→</m:t>
-                    </m:r>
-                  </m:oMath>
-                </a14:m>
-                <a:r>
-                  <a:rPr sz="1000" b="0" i="0" baseline="0" dirty="0">
-                    <a:latin typeface="Calibri"/>
-                  </a:rPr>
-                  <a:t> hard ranking).</a:t>
-                </a:r>
-              </a:p>
-              <a:p>
-                <a:pPr>
-                  <a:lnSpc>
-                    <a:spcPct val="150000"/>
-                  </a:lnSpc>
-                  <a:buChar char="•"/>
-                </a:pPr>
-                <a:r>
-                  <a:rPr sz="1000" b="0" i="0" baseline="0" dirty="0">
-                    <a:latin typeface="Calibri"/>
-                  </a:rPr>
-                  <a:t>  Numerical match flag: True (gap </a:t>
-                </a:r>
-                <a14:m>
-                  <m:oMath xmlns:m="http://schemas.openxmlformats.org/officeDocument/2006/math">
-                    <m:r>
-                      <a:rPr lang="en-US" sz="1000" b="0" i="0" baseline="0" dirty="0" smtClean="0">
-                        <a:latin typeface="Cambria Math" panose="02040503050406030204" pitchFamily="18" charset="0"/>
-                      </a:rPr>
-                      <m:t>&lt;</m:t>
-                    </m:r>
-                    <m:sSup>
-                      <m:sSupPr>
-                        <m:ctrlPr>
-                          <a:rPr lang="en-US" sz="1000" b="0" i="0" baseline="0" dirty="0">
-                            <a:latin typeface="Cambria Math" panose="02040503050406030204" pitchFamily="18" charset="0"/>
-                          </a:rPr>
-                        </m:ctrlPr>
-                      </m:sSupPr>
-                      <m:e>
-                        <m:r>
-                          <a:rPr lang="en-US" sz="1000" b="0" i="0" baseline="0" dirty="0">
-                            <a:latin typeface="Cambria Math" panose="02040503050406030204" pitchFamily="18" charset="0"/>
-                          </a:rPr>
-                          <m:t>10</m:t>
-                        </m:r>
-                      </m:e>
-                      <m:sup>
-                        <m:r>
-                          <a:rPr lang="en-US" sz="1000" b="0" i="0" baseline="0" dirty="0">
-                            <a:latin typeface="Cambria Math" panose="02040503050406030204" pitchFamily="18" charset="0"/>
-                          </a:rPr>
-                          <m:t>−9</m:t>
-                        </m:r>
-                      </m:sup>
-                    </m:sSup>
-                  </m:oMath>
-                </a14:m>
-                <a:r>
-                  <a:rPr sz="1000" b="0" i="0" baseline="0" dirty="0">
-                    <a:latin typeface="Calibri"/>
-                  </a:rPr>
-                  <a:t> on binned curves).</a:t>
-                </a:r>
-              </a:p>
-            </p:txBody>
-          </p:sp>
-        </mc:Choice>
-        <mc:Fallback>
-          <p:sp>
-            <p:nvSpPr>
-              <p:cNvPr id="5" name="TextBox 4"/>
-              <p:cNvSpPr txBox="1">
-                <a:spLocks noRot="1" noChangeAspect="1" noMove="1" noResize="1" noEditPoints="1" noAdjustHandles="1" noChangeArrowheads="1" noChangeShapeType="1" noTextEdit="1"/>
-              </p:cNvSpPr>
-              <p:nvPr/>
-            </p:nvSpPr>
-            <p:spPr>
-              <a:xfrm>
-                <a:off x="1144699" y="5160305"/>
-                <a:ext cx="11663172" cy="802901"/>
-              </a:xfrm>
-              <a:prstGeom prst="rect">
-                <a:avLst/>
-              </a:prstGeom>
-              <a:blipFill>
-                <a:blip r:embed="rId4"/>
-                <a:stretch>
-                  <a:fillRect/>
-                </a:stretch>
-              </a:blipFill>
-            </p:spPr>
-            <p:txBody>
-              <a:bodyPr/>
-              <a:lstStyle/>
-              <a:p>
-                <a:r>
-                  <a:rPr lang="en-US">
-                    <a:noFill/>
-                  </a:rPr>
-                  <a:t> </a:t>
-                </a:r>
-              </a:p>
-            </p:txBody>
-          </p:sp>
-        </mc:Fallback>
-      </mc:AlternateContent>
-      <mc:AlternateContent xmlns:mc="http://schemas.openxmlformats.org/markup-compatibility/2006">
-        <mc:Choice xmlns:a14="http://schemas.microsoft.com/office/drawing/2010/main" Requires="a14">
-          <p:sp>
-            <p:nvSpPr>
-              <p:cNvPr id="6" name="TextBox 5"/>
-              <p:cNvSpPr txBox="1"/>
-              <p:nvPr/>
-            </p:nvSpPr>
-            <p:spPr>
-              <a:xfrm>
-                <a:off x="384048" y="6053328"/>
-                <a:ext cx="6199389" cy="261610"/>
-              </a:xfrm>
-              <a:prstGeom prst="rect">
-                <a:avLst/>
-              </a:prstGeom>
-              <a:noFill/>
-            </p:spPr>
-            <p:txBody>
-              <a:bodyPr wrap="none">
-                <a:spAutoFit/>
-              </a:bodyPr>
-              <a:lstStyle/>
-              <a:p>
-                <a:pPr algn="l"/>
-                <a:r>
-                  <a:rPr sz="1100" b="1" i="0" baseline="0" dirty="0">
-                    <a:latin typeface="Calibri"/>
-                  </a:rPr>
-                  <a:t>Talking point: rule D at cold </a:t>
-                </a:r>
-                <a14:m>
-                  <m:oMath xmlns:m="http://schemas.openxmlformats.org/officeDocument/2006/math">
-                    <m:r>
-                      <a:rPr lang="en-US" sz="1100" b="1" i="0" baseline="0" dirty="0" smtClean="0">
-                        <a:latin typeface="Cambria Math" panose="02040503050406030204" pitchFamily="18" charset="0"/>
-                      </a:rPr>
-                      <m:t>𝑡</m:t>
-                    </m:r>
-                  </m:oMath>
-                </a14:m>
-                <a:r>
-                  <a:rPr sz="1100" b="1" i="0" baseline="0" dirty="0">
-                    <a:latin typeface="Calibri"/>
-                  </a:rPr>
-                  <a:t> reproduces rule C bin-for-bin — Gibbs SELECT nests the old top-</a:t>
-                </a:r>
-                <a14:m>
-                  <m:oMath xmlns:m="http://schemas.openxmlformats.org/officeDocument/2006/math">
-                    <m:r>
-                      <a:rPr lang="en-US" sz="1100" b="1" i="0" baseline="0" dirty="0" smtClean="0">
-                        <a:latin typeface="Cambria Math" panose="02040503050406030204" pitchFamily="18" charset="0"/>
-                      </a:rPr>
-                      <m:t>𝐾</m:t>
-                    </m:r>
-                  </m:oMath>
-                </a14:m>
-                <a:r>
-                  <a:rPr sz="1100" b="1" i="0" baseline="0" dirty="0">
-                    <a:latin typeface="Calibri"/>
-                  </a:rPr>
-                  <a:t> limit.</a:t>
-                </a:r>
-              </a:p>
-            </p:txBody>
-          </p:sp>
-        </mc:Choice>
-        <mc:Fallback>
-          <p:sp>
-            <p:nvSpPr>
-              <p:cNvPr id="6" name="TextBox 5"/>
-              <p:cNvSpPr txBox="1">
-                <a:spLocks noRot="1" noChangeAspect="1" noMove="1" noResize="1" noEditPoints="1" noAdjustHandles="1" noChangeArrowheads="1" noChangeShapeType="1" noTextEdit="1"/>
-              </p:cNvSpPr>
-              <p:nvPr/>
-            </p:nvSpPr>
-            <p:spPr>
-              <a:xfrm>
-                <a:off x="384048" y="6053328"/>
-                <a:ext cx="6199389" cy="261610"/>
-              </a:xfrm>
-              <a:prstGeom prst="rect">
-                <a:avLst/>
-              </a:prstGeom>
-              <a:blipFill>
-                <a:blip r:embed="rId5"/>
-                <a:stretch>
-                  <a:fillRect b="-13636"/>
-                </a:stretch>
-              </a:blipFill>
-            </p:spPr>
-            <p:txBody>
-              <a:bodyPr/>
-              <a:lstStyle/>
-              <a:p>
-                <a:r>
-                  <a:rPr lang="en-US">
-                    <a:noFill/>
-                  </a:rPr>
-                  <a:t> </a:t>
-                </a:r>
-              </a:p>
-            </p:txBody>
-          </p:sp>
-        </mc:Fallback>
-      </mc:AlternateContent>
+      <p:sp>
+        <p:nvSpPr>
+          <p:cNvPr id="5" name="TextBox 4"/>
+          <p:cNvSpPr txBox="1"/>
+          <p:nvPr/>
+        </p:nvSpPr>
+        <p:spPr>
+          <a:xfrm>
+            <a:off x="384048" y="3849624"/>
+            <a:ext cx="3794760" cy="2148840"/>
+          </a:xfrm>
+          <a:prstGeom prst="rect">
+            <a:avLst/>
+          </a:prstGeom>
+          <a:noFill/>
+        </p:spPr>
+        <p:txBody>
+          <a:bodyPr wrap="square">
+            <a:spAutoFit/>
+          </a:bodyPr>
+          <a:lstStyle/>
+          <a:p>
+            <a:pPr>
+              <a:buChar char="•"/>
+              <a:lnSpc>
+                <a:spcPct val="150000"/>
+              </a:lnSpc>
+              <a:spcBef>
+                <a:spcPts val="0"/>
+              </a:spcBef>
+              <a:spcAft>
+                <a:spcPts val="0"/>
+              </a:spcAft>
+            </a:pPr>
+            <a:r>
+              <a:rPr sz="1000" b="0" i="0" baseline="0">
+                <a:latin typeface="Calibri"/>
+              </a:rPr>
+              <a:t>  SELECT: draft rate vs LOO (left) and pool mean (right) — Hero axes.</a:t>
+            </a:r>
+          </a:p>
+          <a:p>
+            <a:pPr>
+              <a:buChar char="•"/>
+              <a:lnSpc>
+                <a:spcPct val="150000"/>
+              </a:lnSpc>
+              <a:spcBef>
+                <a:spcPts val="0"/>
+              </a:spcBef>
+              <a:spcAft>
+                <a:spcPts val="0"/>
+              </a:spcAft>
+            </a:pPr>
+            <a:r>
+              <a:rPr sz="1000" b="0" i="0" baseline="0">
+                <a:latin typeface="Calibri"/>
+              </a:rPr>
+              <a:t>  MBB 2011-2021 · empirical caps · $\rho=0.5$ · rule D · $\lambda$ panels 1.5, 2</a:t>
+            </a:r>
+          </a:p>
+          <a:p>
+            <a:pPr>
+              <a:buChar char="•"/>
+              <a:lnSpc>
+                <a:spcPct val="150000"/>
+              </a:lnSpc>
+              <a:spcBef>
+                <a:spcPts val="0"/>
+              </a:spcBef>
+              <a:spcAft>
+                <a:spcPts val="0"/>
+              </a:spcAft>
+            </a:pPr>
+            <a:r>
+              <a:rPr sz="1000" b="0" i="0" baseline="0">
+                <a:latin typeface="Calibri"/>
+              </a:rPr>
+              <a:t>  Empirical LOO: inverted u like.</a:t>
+            </a:r>
+          </a:p>
+          <a:p>
+            <a:pPr>
+              <a:buChar char="•"/>
+              <a:lnSpc>
+                <a:spcPct val="150000"/>
+              </a:lnSpc>
+              <a:spcBef>
+                <a:spcPts val="0"/>
+              </a:spcBef>
+              <a:spcAft>
+                <a:spcPts val="0"/>
+              </a:spcAft>
+            </a:pPr>
+            <a:r>
+              <a:rPr sz="1000" b="0" i="0" baseline="0">
+                <a:latin typeface="Calibri"/>
+              </a:rPr>
+              <a:t>  $\lambda=1.5$: inverted-U-like on LOO for 9/13 $t$ arms.</a:t>
+            </a:r>
+          </a:p>
+          <a:p>
+            <a:pPr>
+              <a:buChar char="•"/>
+              <a:lnSpc>
+                <a:spcPct val="150000"/>
+              </a:lnSpc>
+              <a:spcBef>
+                <a:spcPts val="0"/>
+              </a:spcBef>
+              <a:spcAft>
+                <a:spcPts val="0"/>
+              </a:spcAft>
+            </a:pPr>
+            <a:r>
+              <a:rPr sz="1000" b="0" i="0" baseline="0">
+                <a:latin typeface="Calibri"/>
+              </a:rPr>
+              <a:t>  $\lambda=2$: inverted-U-like on LOO for 10/13 $t$ arms.</a:t>
+            </a:r>
+          </a:p>
+          <a:p>
+            <a:pPr>
+              <a:buChar char="•"/>
+              <a:lnSpc>
+                <a:spcPct val="150000"/>
+              </a:lnSpc>
+              <a:spcBef>
+                <a:spcPts val="0"/>
+              </a:spcBef>
+              <a:spcAft>
+                <a:spcPts val="0"/>
+              </a:spcAft>
+            </a:pPr>
+            <a:r>
+              <a:rPr sz="1000" b="0" i="0" baseline="0">
+                <a:latin typeface="Calibri"/>
+              </a:rPr>
+              <a:t>  Cold $t$: near hard cut; hot $t$: flattens toward uniform $K$-draws.</a:t>
+            </a:r>
+          </a:p>
+          <a:p>
+            <a:pPr>
+              <a:buChar char="•"/>
+              <a:lnSpc>
+                <a:spcPct val="150000"/>
+              </a:lnSpc>
+              <a:spcBef>
+                <a:spcPts val="0"/>
+              </a:spcBef>
+              <a:spcAft>
+                <a:spcPts val="0"/>
+              </a:spcAft>
+            </a:pPr>
+            <a:r>
+              <a:rPr sz="1000" b="0" i="0" baseline="0">
+                <a:latin typeface="Calibri"/>
+              </a:rPr>
+              <a:t>  Pool mean often stays monotone — same PD17 readout limitation.</a:t>
+            </a:r>
+          </a:p>
+        </p:txBody>
+      </p:sp>
+      <p:sp>
+        <p:nvSpPr>
+          <p:cNvPr id="6" name="TextBox 5"/>
+          <p:cNvSpPr txBox="1"/>
+          <p:nvPr/>
+        </p:nvSpPr>
+        <p:spPr>
+          <a:xfrm>
+            <a:off x="384048" y="6053328"/>
+            <a:ext cx="11423599" cy="420624"/>
+          </a:xfrm>
+          <a:prstGeom prst="rect">
+            <a:avLst/>
+          </a:prstGeom>
+          <a:noFill/>
+        </p:spPr>
+        <p:txBody>
+          <a:bodyPr wrap="none">
+            <a:spAutoFit/>
+          </a:bodyPr>
+          <a:lstStyle/>
+          <a:p>
+            <a:pPr algn="l"/>
+            <a:r>
+              <a:rPr sz="1100" b="1" i="0" baseline="0">
+                <a:latin typeface="Calibri"/>
+              </a:rPr>
+              <a:t>Talking point: check LOO panels at $\lambda=1.5$–$2$ — does a $t$ window preserve inverted-U vs empirical?</a:t>
+            </a:r>
+          </a:p>
+        </p:txBody>
+      </p:sp>
     </p:spTree>
   </p:cSld>
   <p:clrMapOvr>
@@ -5359,8 +3635,8 @@
 </p:sld>
 </file>
 
-<file path=ppt/slides/slide4.xml><?xml version="1.0" encoding="utf-8"?>
-<p:sld xmlns:a="http://schemas.openxmlformats.org/drawingml/2006/main" xmlns:r="http://schemas.openxmlformats.org/officeDocument/2006/relationships" xmlns:p="http://schemas.openxmlformats.org/presentationml/2006/main">
+<file path=ppt/slides/slide3.xml><?xml version="1.0" encoding="utf-8"?>
+<p:sld xmlns:a="http://schemas.openxmlformats.org/drawingml/2006/main" xmlns:p="http://schemas.openxmlformats.org/presentationml/2006/main" xmlns:r="http://schemas.openxmlformats.org/officeDocument/2006/relationships">
   <p:cSld>
     <p:spTree>
       <p:nvGrpSpPr>
@@ -5368,14 +3644,7 @@
         <p:cNvGrpSpPr/>
         <p:nvPr/>
       </p:nvGrpSpPr>
-      <p:grpSpPr>
-        <a:xfrm>
-          <a:off x="0" y="0"/>
-          <a:ext cx="0" cy="0"/>
-          <a:chOff x="0" y="0"/>
-          <a:chExt cx="0" cy="0"/>
-        </a:xfrm>
-      </p:grpSpPr>
+      <p:grpSpPr/>
       <p:sp>
         <p:nvSpPr>
           <p:cNvPr id="2" name="TextBox 1"/>
@@ -5402,7 +3671,7 @@
               <a:rPr sz="2000" b="1" i="0" baseline="0">
                 <a:latin typeface="Calibri"/>
               </a:rPr>
-              <a:t>PD20 takeaways</a:t>
+              <a:t>Cold limit — rule C vs rule D</a:t>
             </a:r>
           </a:p>
         </p:txBody>
@@ -5416,7 +3685,7 @@
         <p:spPr>
           <a:xfrm>
             <a:off x="384048" y="713232"/>
-            <a:ext cx="3088666" cy="307777"/>
+            <a:ext cx="11423599" cy="246888"/>
           </a:xfrm>
           <a:prstGeom prst="rect">
             <a:avLst/>
@@ -5430,7 +3699,286 @@
           <a:lstStyle/>
           <a:p>
             <a:r>
-              <a:rPr sz="1400" b="0" i="0" baseline="0" dirty="0">
+              <a:rPr sz="1000" b="0" i="0" baseline="0">
+                <a:latin typeface="Calibri"/>
+              </a:rPr>
+              <a:t>$\lambda=2$ · $t=0.001$ · same seeds</a:t>
+            </a:r>
+          </a:p>
+        </p:txBody>
+      </p:sp>
+      <p:pic>
+        <p:nvPicPr>
+          <p:cNvPr id="4" name="Picture 3" descr="GRANDCHILD_temperature_cold_limit_2011_2021.png"/>
+          <p:cNvPicPr>
+            <a:picLocks noChangeAspect="1"/>
+          </p:cNvPicPr>
+          <p:nvPr/>
+        </p:nvPicPr>
+        <p:blipFill>
+          <a:blip r:embed="rId2"/>
+          <a:stretch>
+            <a:fillRect/>
+          </a:stretch>
+        </p:blipFill>
+        <p:spPr>
+          <a:xfrm>
+            <a:off x="4379976" y="1952655"/>
+            <a:ext cx="7427671" cy="3144713"/>
+          </a:xfrm>
+          <a:prstGeom prst="rect">
+            <a:avLst/>
+          </a:prstGeom>
+        </p:spPr>
+      </p:pic>
+      <p:sp>
+        <p:nvSpPr>
+          <p:cNvPr id="5" name="TextBox 4"/>
+          <p:cNvSpPr txBox="1"/>
+          <p:nvPr/>
+        </p:nvSpPr>
+        <p:spPr>
+          <a:xfrm>
+            <a:off x="384048" y="3849624"/>
+            <a:ext cx="3794760" cy="2148840"/>
+          </a:xfrm>
+          <a:prstGeom prst="rect">
+            <a:avLst/>
+          </a:prstGeom>
+          <a:noFill/>
+        </p:spPr>
+        <p:txBody>
+          <a:bodyPr wrap="square">
+            <a:spAutoFit/>
+          </a:bodyPr>
+          <a:lstStyle/>
+          <a:p>
+            <a:pPr>
+              <a:buChar char="•"/>
+              <a:lnSpc>
+                <a:spcPct val="150000"/>
+              </a:lnSpc>
+              <a:spcBef>
+                <a:spcPts val="0"/>
+              </a:spcBef>
+              <a:spcAft>
+                <a:spcPts val="0"/>
+              </a:spcAft>
+            </a:pPr>
+            <a:r>
+              <a:rPr sz="1000" b="0" i="0" baseline="0">
+                <a:latin typeface="Calibri"/>
+              </a:rPr>
+              <a:t>  Same ASSIGN seeds; only SELECT rule differs (C = top-$K$, D = cold Gibbs).</a:t>
+            </a:r>
+          </a:p>
+          <a:p>
+            <a:pPr>
+              <a:buChar char="•"/>
+              <a:lnSpc>
+                <a:spcPct val="150000"/>
+              </a:lnSpc>
+              <a:spcBef>
+                <a:spcPts val="0"/>
+              </a:spcBef>
+              <a:spcAft>
+                <a:spcPts val="0"/>
+              </a:spcAft>
+            </a:pPr>
+            <a:r>
+              <a:rPr sz="1000" b="0" i="0" baseline="0">
+                <a:latin typeface="Calibri"/>
+              </a:rPr>
+              <a:t>  Fixed $\lambda=2$, $t=0.001$ ($\log_{10} t = -3$).</a:t>
+            </a:r>
+          </a:p>
+          <a:p>
+            <a:pPr>
+              <a:buChar char="•"/>
+              <a:lnSpc>
+                <a:spcPct val="150000"/>
+              </a:lnSpc>
+              <a:spcBef>
+                <a:spcPts val="0"/>
+              </a:spcBef>
+              <a:spcAft>
+                <a:spcPts val="0"/>
+              </a:spcAft>
+            </a:pPr>
+            <a:r>
+              <a:rPr sz="1000" b="0" i="0" baseline="0">
+                <a:latin typeface="Calibri"/>
+              </a:rPr>
+              <a:t>  Max bin gap C vs D: LOO = 0.00e+00, pool mean = 0.00e+00.</a:t>
+            </a:r>
+          </a:p>
+          <a:p>
+            <a:pPr>
+              <a:buChar char="•"/>
+              <a:lnSpc>
+                <a:spcPct val="150000"/>
+              </a:lnSpc>
+              <a:spcBef>
+                <a:spcPts val="0"/>
+              </a:spcBef>
+              <a:spcAft>
+                <a:spcPts val="0"/>
+              </a:spcAft>
+            </a:pPr>
+            <a:r>
+              <a:rPr sz="1000" b="0" i="0" baseline="0">
+                <a:latin typeface="Calibri"/>
+              </a:rPr>
+              <a:t>  LOO curvature: C = inverted u like; D = inverted u like.</a:t>
+            </a:r>
+          </a:p>
+          <a:p>
+            <a:pPr>
+              <a:buChar char="•"/>
+              <a:lnSpc>
+                <a:spcPct val="150000"/>
+              </a:lnSpc>
+              <a:spcBef>
+                <a:spcPts val="0"/>
+              </a:spcBef>
+              <a:spcAft>
+                <a:spcPts val="0"/>
+              </a:spcAft>
+            </a:pPr>
+            <a:r>
+              <a:rPr sz="1000" b="0" i="0" baseline="0">
+                <a:latin typeface="Calibri"/>
+              </a:rPr>
+              <a:t>  Expect overlay coincidence at cold $t$ (Gibbs $\to$ hard ranking).</a:t>
+            </a:r>
+          </a:p>
+          <a:p>
+            <a:pPr>
+              <a:buChar char="•"/>
+              <a:lnSpc>
+                <a:spcPct val="150000"/>
+              </a:lnSpc>
+              <a:spcBef>
+                <a:spcPts val="0"/>
+              </a:spcBef>
+              <a:spcAft>
+                <a:spcPts val="0"/>
+              </a:spcAft>
+            </a:pPr>
+            <a:r>
+              <a:rPr sz="1000" b="0" i="0" baseline="0">
+                <a:latin typeface="Calibri"/>
+              </a:rPr>
+              <a:t>  Numerical match flag: True (gap $&lt; 10^{-9}$ on binned curves).</a:t>
+            </a:r>
+          </a:p>
+        </p:txBody>
+      </p:sp>
+      <p:sp>
+        <p:nvSpPr>
+          <p:cNvPr id="6" name="TextBox 5"/>
+          <p:cNvSpPr txBox="1"/>
+          <p:nvPr/>
+        </p:nvSpPr>
+        <p:spPr>
+          <a:xfrm>
+            <a:off x="384048" y="6053328"/>
+            <a:ext cx="11423599" cy="420624"/>
+          </a:xfrm>
+          <a:prstGeom prst="rect">
+            <a:avLst/>
+          </a:prstGeom>
+          <a:noFill/>
+        </p:spPr>
+        <p:txBody>
+          <a:bodyPr wrap="none">
+            <a:spAutoFit/>
+          </a:bodyPr>
+          <a:lstStyle/>
+          <a:p>
+            <a:pPr algn="l"/>
+            <a:r>
+              <a:rPr sz="1100" b="1" i="0" baseline="0">
+                <a:latin typeface="Calibri"/>
+              </a:rPr>
+              <a:t>Talking point: rule D at cold $t$ reproduces rule C bin-for-bin — Gibbs SELECT nests the old top-$K$ limit.</a:t>
+            </a:r>
+          </a:p>
+        </p:txBody>
+      </p:sp>
+    </p:spTree>
+  </p:cSld>
+  <p:clrMapOvr>
+    <a:masterClrMapping/>
+  </p:clrMapOvr>
+</p:sld>
+</file>
+
+<file path=ppt/slides/slide4.xml><?xml version="1.0" encoding="utf-8"?>
+<p:sld xmlns:a="http://schemas.openxmlformats.org/drawingml/2006/main" xmlns:p="http://schemas.openxmlformats.org/presentationml/2006/main" xmlns:r="http://schemas.openxmlformats.org/officeDocument/2006/relationships">
+  <p:cSld>
+    <p:spTree>
+      <p:nvGrpSpPr>
+        <p:cNvPr id="1" name=""/>
+        <p:cNvGrpSpPr/>
+        <p:nvPr/>
+      </p:nvGrpSpPr>
+      <p:grpSpPr/>
+      <p:sp>
+        <p:nvSpPr>
+          <p:cNvPr id="2" name="TextBox 1"/>
+          <p:cNvSpPr txBox="1"/>
+          <p:nvPr/>
+        </p:nvSpPr>
+        <p:spPr>
+          <a:xfrm>
+            <a:off x="384048" y="219456"/>
+            <a:ext cx="11423599" cy="457200"/>
+          </a:xfrm>
+          <a:prstGeom prst="rect">
+            <a:avLst/>
+          </a:prstGeom>
+          <a:noFill/>
+        </p:spPr>
+        <p:txBody>
+          <a:bodyPr wrap="none">
+            <a:spAutoFit/>
+          </a:bodyPr>
+          <a:lstStyle/>
+          <a:p>
+            <a:r>
+              <a:rPr sz="2000" b="1" i="0" baseline="0">
+                <a:latin typeface="Calibri"/>
+              </a:rPr>
+              <a:t>PD20 takeaways</a:t>
+            </a:r>
+          </a:p>
+        </p:txBody>
+      </p:sp>
+      <p:sp>
+        <p:nvSpPr>
+          <p:cNvPr id="3" name="TextBox 2"/>
+          <p:cNvSpPr txBox="1"/>
+          <p:nvPr/>
+        </p:nvSpPr>
+        <p:spPr>
+          <a:xfrm>
+            <a:off x="384048" y="713232"/>
+            <a:ext cx="11423599" cy="246888"/>
+          </a:xfrm>
+          <a:prstGeom prst="rect">
+            <a:avLst/>
+          </a:prstGeom>
+          <a:noFill/>
+        </p:spPr>
+        <p:txBody>
+          <a:bodyPr wrap="none">
+            <a:spAutoFit/>
+          </a:bodyPr>
+          <a:lstStyle/>
+          <a:p>
+            <a:r>
+              <a:rPr sz="1000" b="0" i="0" baseline="0">
                 <a:latin typeface="Calibri"/>
               </a:rPr>
               <a:t>MBB 2011-2021 · empirical caps · rule D</a:t>
@@ -5438,494 +3986,149 @@
           </a:p>
         </p:txBody>
       </p:sp>
-      <mc:AlternateContent xmlns:mc="http://schemas.openxmlformats.org/markup-compatibility/2006">
-        <mc:Choice xmlns:a14="http://schemas.microsoft.com/office/drawing/2010/main" Requires="a14">
-          <p:sp>
-            <p:nvSpPr>
-              <p:cNvPr id="4" name="TextBox 3"/>
-              <p:cNvSpPr txBox="1"/>
-              <p:nvPr/>
-            </p:nvSpPr>
-            <p:spPr>
-              <a:xfrm>
-                <a:off x="384048" y="1033272"/>
-                <a:ext cx="11423599" cy="4419928"/>
-              </a:xfrm>
-              <a:prstGeom prst="rect">
-                <a:avLst/>
-              </a:prstGeom>
-              <a:noFill/>
-            </p:spPr>
-            <p:txBody>
-              <a:bodyPr wrap="square">
-                <a:spAutoFit/>
-              </a:bodyPr>
-              <a:lstStyle/>
-              <a:p>
-                <a:pPr>
-                  <a:lnSpc>
-                    <a:spcPct val="200000"/>
-                  </a:lnSpc>
-                  <a:buChar char="•"/>
-                </a:pPr>
-                <a:r>
-                  <a:rPr sz="2400" b="0" i="0" baseline="0" dirty="0">
-                    <a:latin typeface="Calibri"/>
-                  </a:rPr>
-                  <a:t>  PD20 gate (LOO): inverted-U survives Gibbs SELECT at breakpoint </a:t>
-                </a:r>
-                <a14:m>
-                  <m:oMath xmlns:m="http://schemas.openxmlformats.org/officeDocument/2006/math">
-                    <m:r>
-                      <a:rPr lang="en-US" sz="2400" b="0" i="0" baseline="0" dirty="0" smtClean="0">
-                        <a:latin typeface="Cambria Math" panose="02040503050406030204" pitchFamily="18" charset="0"/>
-                      </a:rPr>
-                      <m:t>𝜆</m:t>
-                    </m:r>
-                  </m:oMath>
-                </a14:m>
-                <a:r>
-                  <a:rPr sz="2400" b="0" i="0" baseline="0" dirty="0">
-                    <a:latin typeface="Calibri"/>
-                  </a:rPr>
-                  <a:t>.</a:t>
-                </a:r>
-              </a:p>
-              <a:p>
-                <a:pPr>
-                  <a:lnSpc>
-                    <a:spcPct val="200000"/>
-                  </a:lnSpc>
-                  <a:buChar char="•"/>
-                </a:pPr>
-                <a:r>
-                  <a:rPr sz="2400" b="0" i="0" baseline="0" dirty="0">
-                    <a:latin typeface="Calibri"/>
-                  </a:rPr>
-                  <a:t>  Full panel: </a:t>
-                </a:r>
-                <a14:m>
-                  <m:oMath xmlns:m="http://schemas.openxmlformats.org/officeDocument/2006/math">
-                    <m:r>
-                      <a:rPr lang="en-US" sz="2400" b="0" i="0" baseline="0" dirty="0" smtClean="0">
-                        <a:latin typeface="Cambria Math" panose="02040503050406030204" pitchFamily="18" charset="0"/>
-                      </a:rPr>
-                      <m:t>𝜆</m:t>
-                    </m:r>
-                    <m:r>
-                      <a:rPr lang="en-US" sz="2400" b="0" i="0" baseline="0" dirty="0" smtClean="0">
-                        <a:latin typeface="Cambria Math" panose="02040503050406030204" pitchFamily="18" charset="0"/>
-                      </a:rPr>
-                      <m:t>=1.5</m:t>
-                    </m:r>
-                  </m:oMath>
-                </a14:m>
-                <a:r>
-                  <a:rPr sz="2400" b="0" i="0" baseline="0" dirty="0">
-                    <a:latin typeface="Calibri"/>
-                  </a:rPr>
-                  <a:t> → 9/13 </a:t>
-                </a:r>
-                <a14:m>
-                  <m:oMath xmlns:m="http://schemas.openxmlformats.org/officeDocument/2006/math">
-                    <m:r>
-                      <a:rPr lang="en-US" sz="2400" b="0" i="0" baseline="0" dirty="0" smtClean="0">
-                        <a:latin typeface="Cambria Math" panose="02040503050406030204" pitchFamily="18" charset="0"/>
-                      </a:rPr>
-                      <m:t>𝑡</m:t>
-                    </m:r>
-                  </m:oMath>
-                </a14:m>
-                <a:r>
-                  <a:rPr sz="2400" b="0" i="0" baseline="0" dirty="0">
-                    <a:latin typeface="Calibri"/>
-                  </a:rPr>
-                  <a:t> arms U-like; </a:t>
-                </a:r>
-                <a14:m>
-                  <m:oMath xmlns:m="http://schemas.openxmlformats.org/officeDocument/2006/math">
-                    <m:r>
-                      <a:rPr lang="en-US" sz="2400" b="0" i="0" baseline="0" dirty="0" smtClean="0">
-                        <a:latin typeface="Cambria Math" panose="02040503050406030204" pitchFamily="18" charset="0"/>
-                      </a:rPr>
-                      <m:t>𝜆</m:t>
-                    </m:r>
-                    <m:r>
-                      <a:rPr lang="en-US" sz="2400" b="0" i="0" baseline="0" dirty="0" smtClean="0">
-                        <a:latin typeface="Cambria Math" panose="02040503050406030204" pitchFamily="18" charset="0"/>
-                      </a:rPr>
-                      <m:t>=2</m:t>
-                    </m:r>
-                  </m:oMath>
-                </a14:m>
-                <a:r>
-                  <a:rPr sz="2400" b="0" i="0" baseline="0" dirty="0">
-                    <a:latin typeface="Calibri"/>
-                  </a:rPr>
-                  <a:t> → 10/13 </a:t>
-                </a:r>
-                <a14:m>
-                  <m:oMath xmlns:m="http://schemas.openxmlformats.org/officeDocument/2006/math">
-                    <m:r>
-                      <a:rPr lang="en-US" sz="2400" b="0" i="0" baseline="0" dirty="0" smtClean="0">
-                        <a:latin typeface="Cambria Math" panose="02040503050406030204" pitchFamily="18" charset="0"/>
-                      </a:rPr>
-                      <m:t>𝑡</m:t>
-                    </m:r>
-                  </m:oMath>
-                </a14:m>
-                <a:r>
-                  <a:rPr sz="2400" b="0" i="0" baseline="0" dirty="0">
-                    <a:latin typeface="Calibri"/>
-                  </a:rPr>
-                  <a:t> arms U-like.</a:t>
-                </a:r>
-              </a:p>
-              <a:p>
-                <a:pPr>
-                  <a:lnSpc>
-                    <a:spcPct val="200000"/>
-                  </a:lnSpc>
-                  <a:buChar char="•"/>
-                </a:pPr>
-                <a:r>
-                  <a:rPr sz="2400" b="0" i="0" baseline="0" dirty="0">
-                    <a:latin typeface="Calibri"/>
-                  </a:rPr>
-                  <a:t>  Cold </a:t>
-                </a:r>
-                <a14:m>
-                  <m:oMath xmlns:m="http://schemas.openxmlformats.org/officeDocument/2006/math">
-                    <m:r>
-                      <a:rPr lang="en-US" sz="2400" b="0" i="0" baseline="0" dirty="0" smtClean="0">
-                        <a:latin typeface="Cambria Math" panose="02040503050406030204" pitchFamily="18" charset="0"/>
-                      </a:rPr>
-                      <m:t>𝑡</m:t>
-                    </m:r>
-                  </m:oMath>
-                </a14:m>
-                <a:r>
-                  <a:rPr sz="2400" b="0" i="0" baseline="0" dirty="0">
-                    <a:latin typeface="Calibri"/>
-                  </a:rPr>
-                  <a:t> ≈ top-</a:t>
-                </a:r>
-                <a14:m>
-                  <m:oMath xmlns:m="http://schemas.openxmlformats.org/officeDocument/2006/math">
-                    <m:r>
-                      <a:rPr lang="en-US" sz="2400" b="0" i="0" baseline="0" dirty="0" smtClean="0">
-                        <a:latin typeface="Cambria Math" panose="02040503050406030204" pitchFamily="18" charset="0"/>
-                      </a:rPr>
-                      <m:t>𝐾</m:t>
-                    </m:r>
-                  </m:oMath>
-                </a14:m>
-                <a:r>
-                  <a:rPr sz="2400" b="0" i="0" baseline="0" dirty="0">
-                    <a:latin typeface="Calibri"/>
-                  </a:rPr>
-                  <a:t> (slide 3); mid </a:t>
-                </a:r>
-                <a14:m>
-                  <m:oMath xmlns:m="http://schemas.openxmlformats.org/officeDocument/2006/math">
-                    <m:r>
-                      <a:rPr lang="en-US" sz="2400" b="0" i="0" baseline="0" dirty="0" smtClean="0">
-                        <a:latin typeface="Cambria Math" panose="02040503050406030204" pitchFamily="18" charset="0"/>
-                      </a:rPr>
-                      <m:t>𝑡</m:t>
-                    </m:r>
-                  </m:oMath>
-                </a14:m>
-                <a:r>
-                  <a:rPr sz="2400" b="0" i="0" baseline="0" dirty="0">
-                    <a:latin typeface="Calibri"/>
-                  </a:rPr>
-                  <a:t> still shows hump on LOO.</a:t>
-                </a:r>
-              </a:p>
-              <a:p>
-                <a:pPr>
-                  <a:lnSpc>
-                    <a:spcPct val="200000"/>
-                  </a:lnSpc>
-                  <a:buChar char="•"/>
-                </a:pPr>
-                <a:r>
-                  <a:rPr sz="2400" b="0" i="0" baseline="0" dirty="0">
-                    <a:latin typeface="Calibri"/>
-                  </a:rPr>
-                  <a:t>  Hot </a:t>
-                </a:r>
-                <a14:m>
-                  <m:oMath xmlns:m="http://schemas.openxmlformats.org/officeDocument/2006/math">
-                    <m:r>
-                      <a:rPr lang="en-US" sz="2400" b="0" i="0" baseline="0" dirty="0" smtClean="0">
-                        <a:latin typeface="Cambria Math" panose="02040503050406030204" pitchFamily="18" charset="0"/>
-                      </a:rPr>
-                      <m:t>𝑡</m:t>
-                    </m:r>
-                  </m:oMath>
-                </a14:m>
-                <a:r>
-                  <a:rPr sz="2400" b="0" i="0" baseline="0" dirty="0">
-                    <a:latin typeface="Calibri"/>
-                  </a:rPr>
-                  <a:t> → uniform-</a:t>
-                </a:r>
-                <a14:m>
-                  <m:oMath xmlns:m="http://schemas.openxmlformats.org/officeDocument/2006/math">
-                    <m:r>
-                      <a:rPr lang="en-US" sz="2400" b="0" i="0" baseline="0" dirty="0" smtClean="0">
-                        <a:latin typeface="Cambria Math" panose="02040503050406030204" pitchFamily="18" charset="0"/>
-                      </a:rPr>
-                      <m:t>𝐾</m:t>
-                    </m:r>
-                  </m:oMath>
-                </a14:m>
-                <a:r>
-                  <a:rPr sz="2400" b="0" i="0" baseline="0" dirty="0">
-                    <a:latin typeface="Calibri"/>
-                  </a:rPr>
-                  <a:t> limit (flattening) — different failure mode.</a:t>
-                </a:r>
-              </a:p>
-              <a:p>
-                <a:pPr>
-                  <a:lnSpc>
-                    <a:spcPct val="200000"/>
-                  </a:lnSpc>
-                  <a:buChar char="•"/>
-                </a:pPr>
-                <a:r>
-                  <a:rPr sz="2400" b="0" i="0" baseline="0" dirty="0">
-                    <a:latin typeface="Calibri"/>
-                  </a:rPr>
-                  <a:t>  Open for Alex: K-draw vs literal </a:t>
-                </a:r>
-                <a:r>
-                  <a:rPr sz="2400" b="0" i="0" baseline="0" dirty="0" err="1">
-                    <a:latin typeface="Calibri"/>
-                  </a:rPr>
-                  <a:t>softmax</a:t>
-                </a:r>
-                <a:r>
-                  <a:rPr sz="2400" b="0" i="0" baseline="0" dirty="0">
-                    <a:latin typeface="Calibri"/>
-                  </a:rPr>
-                  <a:t> Bernoulli for MLE.</a:t>
-                </a:r>
-              </a:p>
-              <a:p>
-                <a:pPr>
-                  <a:lnSpc>
-                    <a:spcPct val="200000"/>
-                  </a:lnSpc>
-                  <a:buChar char="•"/>
-                </a:pPr>
-                <a:r>
-                  <a:rPr sz="2400" b="0" i="0" baseline="0" dirty="0">
-                    <a:latin typeface="Calibri"/>
-                  </a:rPr>
-                  <a:t>  Next: MLE for </a:t>
-                </a:r>
-                <a14:m>
-                  <m:oMath xmlns:m="http://schemas.openxmlformats.org/officeDocument/2006/math">
-                    <m:sSup>
-                      <m:sSupPr>
-                        <m:ctrlPr>
-                          <a:rPr lang="en-US" sz="2400" b="0" i="0" baseline="0" dirty="0">
-                            <a:latin typeface="Cambria Math" panose="02040503050406030204" pitchFamily="18" charset="0"/>
-                          </a:rPr>
-                        </m:ctrlPr>
-                      </m:sSupPr>
-                      <m:e>
-                        <m:r>
-                          <a:rPr lang="en-US" sz="2400" b="0" i="0" baseline="0" dirty="0">
-                            <a:latin typeface="Cambria Math" panose="02040503050406030204" pitchFamily="18" charset="0"/>
-                          </a:rPr>
-                          <m:t>𝜆</m:t>
-                        </m:r>
-                      </m:e>
-                      <m:sup>
-                        <m:r>
-                          <a:rPr lang="en-US" sz="2400" b="0" i="0" baseline="0" dirty="0">
-                            <a:latin typeface="Cambria Math" panose="02040503050406030204" pitchFamily="18" charset="0"/>
-                          </a:rPr>
-                          <m:t>∗</m:t>
-                        </m:r>
-                      </m:sup>
-                    </m:sSup>
-                    <m:r>
-                      <a:rPr lang="en-US" sz="2400" b="0" i="0" baseline="0" dirty="0">
-                        <a:latin typeface="Cambria Math" panose="02040503050406030204" pitchFamily="18" charset="0"/>
-                      </a:rPr>
-                      <m:t>,</m:t>
-                    </m:r>
-                    <m:sSup>
-                      <m:sSupPr>
-                        <m:ctrlPr>
-                          <a:rPr lang="en-US" sz="2400" b="0" i="0" baseline="0" dirty="0">
-                            <a:latin typeface="Cambria Math" panose="02040503050406030204" pitchFamily="18" charset="0"/>
-                          </a:rPr>
-                        </m:ctrlPr>
-                      </m:sSupPr>
-                      <m:e>
-                        <m:r>
-                          <a:rPr lang="en-US" sz="2400" b="0" i="0" baseline="0" dirty="0">
-                            <a:latin typeface="Cambria Math" panose="02040503050406030204" pitchFamily="18" charset="0"/>
-                          </a:rPr>
-                          <m:t>𝑡</m:t>
-                        </m:r>
-                      </m:e>
-                      <m:sup>
-                        <m:r>
-                          <a:rPr lang="en-US" sz="2400" b="0" i="0" baseline="0" dirty="0">
-                            <a:latin typeface="Cambria Math" panose="02040503050406030204" pitchFamily="18" charset="0"/>
-                          </a:rPr>
-                          <m:t>∗</m:t>
-                        </m:r>
-                      </m:sup>
-                    </m:sSup>
-                  </m:oMath>
-                </a14:m>
-                <a:r>
-                  <a:rPr sz="2400" b="0" i="0" baseline="0" dirty="0">
-                    <a:latin typeface="Calibri"/>
-                  </a:rPr>
-                  <a:t> (and </a:t>
-                </a:r>
-                <a14:m>
-                  <m:oMath xmlns:m="http://schemas.openxmlformats.org/officeDocument/2006/math">
-                    <m:r>
-                      <a:rPr lang="en-US" sz="2400" b="0" i="0" baseline="0" dirty="0" smtClean="0">
-                        <a:latin typeface="Cambria Math" panose="02040503050406030204" pitchFamily="18" charset="0"/>
-                      </a:rPr>
-                      <m:t>𝛾</m:t>
-                    </m:r>
-                  </m:oMath>
-                </a14:m>
-                <a:r>
-                  <a:rPr sz="2400" b="0" i="0" baseline="0" dirty="0">
-                    <a:latin typeface="Calibri"/>
-                  </a:rPr>
-                  <a:t>); </a:t>
-                </a:r>
-                <a14:m>
-                  <m:oMath xmlns:m="http://schemas.openxmlformats.org/officeDocument/2006/math">
-                    <m:sSup>
-                      <m:sSupPr>
-                        <m:ctrlPr>
-                          <a:rPr lang="en-US" sz="2400" b="0" i="0" baseline="0" dirty="0">
-                            <a:latin typeface="Cambria Math" panose="02040503050406030204" pitchFamily="18" charset="0"/>
-                          </a:rPr>
-                        </m:ctrlPr>
-                      </m:sSupPr>
-                      <m:e>
-                        <m:r>
-                          <a:rPr lang="en-US" sz="2400" b="0" i="0" baseline="0" dirty="0">
-                            <a:latin typeface="Cambria Math" panose="02040503050406030204" pitchFamily="18" charset="0"/>
-                          </a:rPr>
-                          <m:t>𝜌</m:t>
-                        </m:r>
-                      </m:e>
-                      <m:sup>
-                        <m:r>
-                          <a:rPr lang="en-US" sz="2400" b="0" i="0" baseline="0" dirty="0">
-                            <a:latin typeface="Cambria Math" panose="02040503050406030204" pitchFamily="18" charset="0"/>
-                          </a:rPr>
-                          <m:t>∗</m:t>
-                        </m:r>
-                      </m:sup>
-                    </m:sSup>
-                  </m:oMath>
-                </a14:m>
-                <a:r>
-                  <a:rPr sz="2400" b="0" i="0" baseline="0" dirty="0">
-                    <a:latin typeface="Calibri"/>
-                  </a:rPr>
-                  <a:t> via </a:t>
-                </a:r>
-                <a14:m>
-                  <m:oMath xmlns:m="http://schemas.openxmlformats.org/officeDocument/2006/math">
-                    <m:sSub>
-                      <m:sSubPr>
-                        <m:ctrlPr>
-                          <a:rPr lang="en-US" sz="2400" b="0" i="0" baseline="0" dirty="0">
-                            <a:latin typeface="Cambria Math" panose="02040503050406030204" pitchFamily="18" charset="0"/>
-                          </a:rPr>
-                        </m:ctrlPr>
-                      </m:sSubPr>
-                      <m:e>
-                        <m:r>
-                          <a:rPr lang="en-US" sz="2400" b="0" i="0" baseline="0" dirty="0">
-                            <a:latin typeface="Cambria Math" panose="02040503050406030204" pitchFamily="18" charset="0"/>
-                          </a:rPr>
-                          <m:t>𝐻</m:t>
-                        </m:r>
-                      </m:e>
-                      <m:sub>
-                        <m:r>
-                          <m:rPr>
-                            <m:sty m:val="p"/>
-                          </m:rPr>
-                          <a:rPr lang="en-US" sz="2400" b="0" i="0" baseline="0" dirty="0">
-                            <a:latin typeface="Cambria Math" panose="02040503050406030204" pitchFamily="18" charset="0"/>
-                          </a:rPr>
-                          <m:t>sort</m:t>
-                        </m:r>
-                      </m:sub>
-                    </m:sSub>
-                  </m:oMath>
-                </a14:m>
-                <a:r>
-                  <a:rPr sz="2400" b="0" i="0" baseline="0" dirty="0">
-                    <a:latin typeface="Calibri"/>
-                  </a:rPr>
-                  <a:t> separately.</a:t>
-                </a:r>
-              </a:p>
-            </p:txBody>
-          </p:sp>
-        </mc:Choice>
-        <mc:Fallback>
-          <p:sp>
-            <p:nvSpPr>
-              <p:cNvPr id="4" name="TextBox 3"/>
-              <p:cNvSpPr txBox="1">
-                <a:spLocks noRot="1" noChangeAspect="1" noMove="1" noResize="1" noEditPoints="1" noAdjustHandles="1" noChangeArrowheads="1" noChangeShapeType="1" noTextEdit="1"/>
-              </p:cNvSpPr>
-              <p:nvPr/>
-            </p:nvSpPr>
-            <p:spPr>
-              <a:xfrm>
-                <a:off x="384048" y="1033272"/>
-                <a:ext cx="11423599" cy="4419928"/>
-              </a:xfrm>
-              <a:prstGeom prst="rect">
-                <a:avLst/>
-              </a:prstGeom>
-              <a:blipFill>
-                <a:blip r:embed="rId2"/>
-                <a:stretch>
-                  <a:fillRect l="-889" b="-2006"/>
-                </a:stretch>
-              </a:blipFill>
-            </p:spPr>
-            <p:txBody>
-              <a:bodyPr/>
-              <a:lstStyle/>
-              <a:p>
-                <a:r>
-                  <a:rPr lang="en-US">
-                    <a:noFill/>
-                  </a:rPr>
-                  <a:t> </a:t>
-                </a:r>
-              </a:p>
-            </p:txBody>
-          </p:sp>
-        </mc:Fallback>
-      </mc:AlternateContent>
+      <p:sp>
+        <p:nvSpPr>
+          <p:cNvPr id="4" name="TextBox 3"/>
+          <p:cNvSpPr txBox="1"/>
+          <p:nvPr/>
+        </p:nvSpPr>
+        <p:spPr>
+          <a:xfrm>
+            <a:off x="384048" y="1033272"/>
+            <a:ext cx="11423599" cy="4965192"/>
+          </a:xfrm>
+          <a:prstGeom prst="rect">
+            <a:avLst/>
+          </a:prstGeom>
+          <a:noFill/>
+        </p:spPr>
+        <p:txBody>
+          <a:bodyPr wrap="square">
+            <a:spAutoFit/>
+          </a:bodyPr>
+          <a:lstStyle/>
+          <a:p>
+            <a:pPr>
+              <a:buChar char="•"/>
+              <a:lnSpc>
+                <a:spcPct val="150000"/>
+              </a:lnSpc>
+              <a:spcBef>
+                <a:spcPts val="0"/>
+              </a:spcBef>
+              <a:spcAft>
+                <a:spcPts val="0"/>
+              </a:spcAft>
+            </a:pPr>
+            <a:r>
+              <a:rPr sz="1000" b="0" i="0" baseline="0">
+                <a:latin typeface="Calibri"/>
+              </a:rPr>
+              <a:t>  PD20 gate (LOO): inverted-U survives Gibbs SELECT at breakpoint $\lambda$.</a:t>
+            </a:r>
+          </a:p>
+          <a:p>
+            <a:pPr>
+              <a:buChar char="•"/>
+              <a:lnSpc>
+                <a:spcPct val="150000"/>
+              </a:lnSpc>
+              <a:spcBef>
+                <a:spcPts val="0"/>
+              </a:spcBef>
+              <a:spcAft>
+                <a:spcPts val="0"/>
+              </a:spcAft>
+            </a:pPr>
+            <a:r>
+              <a:rPr sz="1000" b="0" i="0" baseline="0">
+                <a:latin typeface="Calibri"/>
+              </a:rPr>
+              <a:t>  Full panel: $\lambda=1.5$ → 9/13 $t$ arms U-like; $\lambda=2$ → 10/13 $t$ arms U-like.</a:t>
+            </a:r>
+          </a:p>
+          <a:p>
+            <a:pPr>
+              <a:buChar char="•"/>
+              <a:lnSpc>
+                <a:spcPct val="150000"/>
+              </a:lnSpc>
+              <a:spcBef>
+                <a:spcPts val="0"/>
+              </a:spcBef>
+              <a:spcAft>
+                <a:spcPts val="0"/>
+              </a:spcAft>
+            </a:pPr>
+            <a:r>
+              <a:rPr sz="1000" b="0" i="0" baseline="0">
+                <a:latin typeface="Calibri"/>
+              </a:rPr>
+              <a:t>  Cold $t$ ≈ top-$K$ (slide 3); mid $t$ still shows hump on LOO.</a:t>
+            </a:r>
+          </a:p>
+          <a:p>
+            <a:pPr>
+              <a:buChar char="•"/>
+              <a:lnSpc>
+                <a:spcPct val="150000"/>
+              </a:lnSpc>
+              <a:spcBef>
+                <a:spcPts val="0"/>
+              </a:spcBef>
+              <a:spcAft>
+                <a:spcPts val="0"/>
+              </a:spcAft>
+            </a:pPr>
+            <a:r>
+              <a:rPr sz="1000" b="0" i="0" baseline="0">
+                <a:latin typeface="Calibri"/>
+              </a:rPr>
+              <a:t>  Hot $t$ → uniform-$K$ limit (flattening) — different failure mode.</a:t>
+            </a:r>
+          </a:p>
+          <a:p>
+            <a:pPr>
+              <a:buChar char="•"/>
+              <a:lnSpc>
+                <a:spcPct val="150000"/>
+              </a:lnSpc>
+              <a:spcBef>
+                <a:spcPts val="0"/>
+              </a:spcBef>
+              <a:spcAft>
+                <a:spcPts val="0"/>
+              </a:spcAft>
+            </a:pPr>
+            <a:r>
+              <a:rPr sz="1000" b="0" i="0" baseline="0">
+                <a:latin typeface="Calibri"/>
+              </a:rPr>
+              <a:t>  Open for Alex: K-draw vs literal softmax Bernoulli for MLE.</a:t>
+            </a:r>
+          </a:p>
+          <a:p>
+            <a:pPr>
+              <a:buChar char="•"/>
+              <a:lnSpc>
+                <a:spcPct val="150000"/>
+              </a:lnSpc>
+              <a:spcBef>
+                <a:spcPts val="0"/>
+              </a:spcBef>
+              <a:spcAft>
+                <a:spcPts val="0"/>
+              </a:spcAft>
+            </a:pPr>
+            <a:r>
+              <a:rPr sz="1000" b="0" i="0" baseline="0">
+                <a:latin typeface="Calibri"/>
+              </a:rPr>
+              <a:t>  Next: MLE for $\lambda^*, t^*$ (and $\gamma$); $\rho^*$ via $H_{\mathrm{sort}}$ separately.</a:t>
+            </a:r>
+          </a:p>
+        </p:txBody>
+      </p:sp>
       <p:sp>
         <p:nvSpPr>
           <p:cNvPr id="5" name="TextBox 4"/>
